--- a/SQLD 실습 환경 구축.pptx
+++ b/SQLD 실습 환경 구축.pptx
@@ -6,10 +6,10 @@
     <p:sldMasterId id="2147483661" r:id="rId2"/>
   </p:sldMasterIdLst>
   <p:notesMasterIdLst>
-    <p:notesMasterId r:id="rId20"/>
+    <p:notesMasterId r:id="rId21"/>
   </p:notesMasterIdLst>
   <p:handoutMasterIdLst>
-    <p:handoutMasterId r:id="rId21"/>
+    <p:handoutMasterId r:id="rId22"/>
   </p:handoutMasterIdLst>
   <p:sldIdLst>
     <p:sldId id="287" r:id="rId3"/>
@@ -22,13 +22,14 @@
     <p:sldId id="336" r:id="rId10"/>
     <p:sldId id="337" r:id="rId11"/>
     <p:sldId id="323" r:id="rId12"/>
-    <p:sldId id="339" r:id="rId13"/>
-    <p:sldId id="332" r:id="rId14"/>
-    <p:sldId id="340" r:id="rId15"/>
-    <p:sldId id="343" r:id="rId16"/>
-    <p:sldId id="342" r:id="rId17"/>
-    <p:sldId id="329" r:id="rId18"/>
-    <p:sldId id="328" r:id="rId19"/>
+    <p:sldId id="345" r:id="rId13"/>
+    <p:sldId id="339" r:id="rId14"/>
+    <p:sldId id="332" r:id="rId15"/>
+    <p:sldId id="340" r:id="rId16"/>
+    <p:sldId id="343" r:id="rId17"/>
+    <p:sldId id="342" r:id="rId18"/>
+    <p:sldId id="329" r:id="rId19"/>
+    <p:sldId id="328" r:id="rId20"/>
   </p:sldIdLst>
   <p:sldSz cx="12192000" cy="6858000"/>
   <p:notesSz cx="6858000" cy="9144000"/>
@@ -201,7 +202,7 @@
           <p:cNvPr id="2" name="머리글 개체 틀 1">
             <a:extLst>
               <a:ext uri="{FF2B5EF4-FFF2-40B4-BE49-F238E27FC236}">
-                <a16:creationId xmlns="" xmlns:a16="http://schemas.microsoft.com/office/drawing/2014/main" id="{C63692A2-EA1B-EC3A-13E4-446D9EEED3F9}"/>
+                <a16:creationId xmlns:a16="http://schemas.microsoft.com/office/drawing/2014/main" id="{C63692A2-EA1B-EC3A-13E4-446D9EEED3F9}"/>
               </a:ext>
             </a:extLst>
           </p:cNvPr>
@@ -238,7 +239,7 @@
           <p:cNvPr id="3" name="날짜 개체 틀 2">
             <a:extLst>
               <a:ext uri="{FF2B5EF4-FFF2-40B4-BE49-F238E27FC236}">
-                <a16:creationId xmlns="" xmlns:a16="http://schemas.microsoft.com/office/drawing/2014/main" id="{6ABEA31F-E8F4-FD23-BA57-16B1EDEA2647}"/>
+                <a16:creationId xmlns:a16="http://schemas.microsoft.com/office/drawing/2014/main" id="{6ABEA31F-E8F4-FD23-BA57-16B1EDEA2647}"/>
               </a:ext>
             </a:extLst>
           </p:cNvPr>
@@ -268,7 +269,7 @@
           <a:p>
             <a:fld id="{B9339CF8-2575-47DE-8A44-B65709B35F2E}" type="datetimeFigureOut">
               <a:rPr lang="ko-KR" altLang="en-US" smtClean="0"/>
-              <a:t>2026-05-15</a:t>
+              <a:t>2026-05-18</a:t>
             </a:fld>
             <a:endParaRPr lang="ko-KR" altLang="en-US"/>
           </a:p>
@@ -279,7 +280,7 @@
           <p:cNvPr id="4" name="바닥글 개체 틀 3">
             <a:extLst>
               <a:ext uri="{FF2B5EF4-FFF2-40B4-BE49-F238E27FC236}">
-                <a16:creationId xmlns="" xmlns:a16="http://schemas.microsoft.com/office/drawing/2014/main" id="{93F27989-F4EE-AE1B-252B-014A303D24EE}"/>
+                <a16:creationId xmlns:a16="http://schemas.microsoft.com/office/drawing/2014/main" id="{93F27989-F4EE-AE1B-252B-014A303D24EE}"/>
               </a:ext>
             </a:extLst>
           </p:cNvPr>
@@ -316,7 +317,7 @@
           <p:cNvPr id="5" name="슬라이드 번호 개체 틀 4">
             <a:extLst>
               <a:ext uri="{FF2B5EF4-FFF2-40B4-BE49-F238E27FC236}">
-                <a16:creationId xmlns="" xmlns:a16="http://schemas.microsoft.com/office/drawing/2014/main" id="{1629EAF4-5825-593C-3373-B140E184CBEE}"/>
+                <a16:creationId xmlns:a16="http://schemas.microsoft.com/office/drawing/2014/main" id="{1629EAF4-5825-593C-3373-B140E184CBEE}"/>
               </a:ext>
             </a:extLst>
           </p:cNvPr>
@@ -462,7 +463,7 @@
           <a:p>
             <a:fld id="{D28CB966-86B2-4E9B-A70A-8ECCC2154A71}" type="datetimeFigureOut">
               <a:rPr lang="ko-KR" altLang="en-US" smtClean="0"/>
-              <a:t>2026-05-15</a:t>
+              <a:t>2026-05-18</a:t>
             </a:fld>
             <a:endParaRPr lang="ko-KR" altLang="en-US"/>
           </a:p>
@@ -752,7 +753,7 @@
           <p:cNvPr id="7" name="그룹 6">
             <a:extLst>
               <a:ext uri="{FF2B5EF4-FFF2-40B4-BE49-F238E27FC236}">
-                <a16:creationId xmlns="" xmlns:a16="http://schemas.microsoft.com/office/drawing/2014/main" id="{3BFDF301-1ECD-F664-8C75-7BC50EEA315C}"/>
+                <a16:creationId xmlns:a16="http://schemas.microsoft.com/office/drawing/2014/main" id="{3BFDF301-1ECD-F664-8C75-7BC50EEA315C}"/>
               </a:ext>
             </a:extLst>
           </p:cNvPr>
@@ -772,7 +773,7 @@
             <p:cNvPr id="8" name="그림 7">
               <a:extLst>
                 <a:ext uri="{FF2B5EF4-FFF2-40B4-BE49-F238E27FC236}">
-                  <a16:creationId xmlns="" xmlns:a16="http://schemas.microsoft.com/office/drawing/2014/main" id="{3656F08F-D55A-400E-A7C5-D0CED11E26EE}"/>
+                  <a16:creationId xmlns:a16="http://schemas.microsoft.com/office/drawing/2014/main" id="{3656F08F-D55A-400E-A7C5-D0CED11E26EE}"/>
                 </a:ext>
               </a:extLst>
             </p:cNvPr>
@@ -808,7 +809,7 @@
             <p:cNvPr id="9" name="그래픽 8">
               <a:extLst>
                 <a:ext uri="{FF2B5EF4-FFF2-40B4-BE49-F238E27FC236}">
-                  <a16:creationId xmlns="" xmlns:a16="http://schemas.microsoft.com/office/drawing/2014/main" id="{FACDD2A8-6019-3D59-3839-2A3930A4AC80}"/>
+                  <a16:creationId xmlns:a16="http://schemas.microsoft.com/office/drawing/2014/main" id="{FACDD2A8-6019-3D59-3839-2A3930A4AC80}"/>
                 </a:ext>
               </a:extLst>
             </p:cNvPr>
@@ -821,7 +822,7 @@
             <a:blip r:embed="rId3">
               <a:extLst>
                 <a:ext uri="{96DAC541-7B7A-43D3-8B79-37D633B846F1}">
-                  <asvg:svgBlip xmlns="" xmlns:asvg="http://schemas.microsoft.com/office/drawing/2016/SVG/main" r:embed="rId4"/>
+                  <asvg:svgBlip xmlns:asvg="http://schemas.microsoft.com/office/drawing/2016/SVG/main" xmlns="" r:embed="rId4"/>
                 </a:ext>
               </a:extLst>
             </a:blip>
@@ -844,7 +845,7 @@
             <p:cNvPr id="10" name="그래픽 9">
               <a:extLst>
                 <a:ext uri="{FF2B5EF4-FFF2-40B4-BE49-F238E27FC236}">
-                  <a16:creationId xmlns="" xmlns:a16="http://schemas.microsoft.com/office/drawing/2014/main" id="{78C6B37A-E99B-3745-49D4-2BD70A378B9C}"/>
+                  <a16:creationId xmlns:a16="http://schemas.microsoft.com/office/drawing/2014/main" id="{78C6B37A-E99B-3745-49D4-2BD70A378B9C}"/>
                 </a:ext>
               </a:extLst>
             </p:cNvPr>
@@ -857,7 +858,7 @@
             <a:blip r:embed="rId5">
               <a:extLst>
                 <a:ext uri="{96DAC541-7B7A-43D3-8B79-37D633B846F1}">
-                  <asvg:svgBlip xmlns="" xmlns:asvg="http://schemas.microsoft.com/office/drawing/2016/SVG/main" r:embed="rId6"/>
+                  <asvg:svgBlip xmlns:asvg="http://schemas.microsoft.com/office/drawing/2016/SVG/main" xmlns="" r:embed="rId6"/>
                 </a:ext>
               </a:extLst>
             </a:blip>
@@ -880,7 +881,7 @@
             <p:cNvPr id="11" name="타원 10">
               <a:extLst>
                 <a:ext uri="{FF2B5EF4-FFF2-40B4-BE49-F238E27FC236}">
-                  <a16:creationId xmlns="" xmlns:a16="http://schemas.microsoft.com/office/drawing/2014/main" id="{4CBC895A-F71F-92D8-0025-EEB7C91EAA7C}"/>
+                  <a16:creationId xmlns:a16="http://schemas.microsoft.com/office/drawing/2014/main" id="{4CBC895A-F71F-92D8-0025-EEB7C91EAA7C}"/>
                 </a:ext>
               </a:extLst>
             </p:cNvPr>
@@ -932,7 +933,7 @@
             <p:cNvPr id="12" name="직사각형 11">
               <a:extLst>
                 <a:ext uri="{FF2B5EF4-FFF2-40B4-BE49-F238E27FC236}">
-                  <a16:creationId xmlns="" xmlns:a16="http://schemas.microsoft.com/office/drawing/2014/main" id="{C594473B-E8FA-68E2-9A30-3A4D5B29DD6D}"/>
+                  <a16:creationId xmlns:a16="http://schemas.microsoft.com/office/drawing/2014/main" id="{C594473B-E8FA-68E2-9A30-3A4D5B29DD6D}"/>
                 </a:ext>
               </a:extLst>
             </p:cNvPr>
@@ -986,7 +987,7 @@
             <p:cNvPr id="13" name="그래픽 12">
               <a:extLst>
                 <a:ext uri="{FF2B5EF4-FFF2-40B4-BE49-F238E27FC236}">
-                  <a16:creationId xmlns="" xmlns:a16="http://schemas.microsoft.com/office/drawing/2014/main" id="{814F6B0C-ED51-D318-F09A-D0B58E18F817}"/>
+                  <a16:creationId xmlns:a16="http://schemas.microsoft.com/office/drawing/2014/main" id="{814F6B0C-ED51-D318-F09A-D0B58E18F817}"/>
                 </a:ext>
               </a:extLst>
             </p:cNvPr>
@@ -999,7 +1000,7 @@
             <a:blip r:embed="rId7">
               <a:extLst>
                 <a:ext uri="{96DAC541-7B7A-43D3-8B79-37D633B846F1}">
-                  <asvg:svgBlip xmlns="" xmlns:asvg="http://schemas.microsoft.com/office/drawing/2016/SVG/main" r:embed="rId8"/>
+                  <asvg:svgBlip xmlns:asvg="http://schemas.microsoft.com/office/drawing/2016/SVG/main" xmlns="" r:embed="rId8"/>
                 </a:ext>
               </a:extLst>
             </a:blip>
@@ -1069,7 +1070,7 @@
           <p:cNvPr id="8" name="직사각형 7">
             <a:extLst>
               <a:ext uri="{FF2B5EF4-FFF2-40B4-BE49-F238E27FC236}">
-                <a16:creationId xmlns="" xmlns:a16="http://schemas.microsoft.com/office/drawing/2014/main" id="{44F1409F-16BC-9CF1-DD56-BF8162310158}"/>
+                <a16:creationId xmlns:a16="http://schemas.microsoft.com/office/drawing/2014/main" id="{44F1409F-16BC-9CF1-DD56-BF8162310158}"/>
               </a:ext>
             </a:extLst>
           </p:cNvPr>
@@ -1174,7 +1175,7 @@
           <p:cNvPr id="8" name="그룹 7">
             <a:extLst>
               <a:ext uri="{FF2B5EF4-FFF2-40B4-BE49-F238E27FC236}">
-                <a16:creationId xmlns="" xmlns:a16="http://schemas.microsoft.com/office/drawing/2014/main" id="{116A249F-B45D-6270-49C3-1679BD548B6F}"/>
+                <a16:creationId xmlns:a16="http://schemas.microsoft.com/office/drawing/2014/main" id="{116A249F-B45D-6270-49C3-1679BD548B6F}"/>
               </a:ext>
             </a:extLst>
           </p:cNvPr>
@@ -1194,7 +1195,7 @@
             <p:cNvPr id="12" name="그림 11">
               <a:extLst>
                 <a:ext uri="{FF2B5EF4-FFF2-40B4-BE49-F238E27FC236}">
-                  <a16:creationId xmlns="" xmlns:a16="http://schemas.microsoft.com/office/drawing/2014/main" id="{19C47A8D-31AB-0FCC-3D14-214C92332F53}"/>
+                  <a16:creationId xmlns:a16="http://schemas.microsoft.com/office/drawing/2014/main" id="{19C47A8D-31AB-0FCC-3D14-214C92332F53}"/>
                 </a:ext>
               </a:extLst>
             </p:cNvPr>
@@ -1239,7 +1240,7 @@
             <p:cNvPr id="13" name="그림 12">
               <a:extLst>
                 <a:ext uri="{FF2B5EF4-FFF2-40B4-BE49-F238E27FC236}">
-                  <a16:creationId xmlns="" xmlns:a16="http://schemas.microsoft.com/office/drawing/2014/main" id="{96A501CF-FFE7-D0AD-0BEB-FCF8984D1D14}"/>
+                  <a16:creationId xmlns:a16="http://schemas.microsoft.com/office/drawing/2014/main" id="{96A501CF-FFE7-D0AD-0BEB-FCF8984D1D14}"/>
                 </a:ext>
               </a:extLst>
             </p:cNvPr>
@@ -1284,7 +1285,7 @@
             <p:cNvPr id="14" name="그림 13">
               <a:extLst>
                 <a:ext uri="{FF2B5EF4-FFF2-40B4-BE49-F238E27FC236}">
-                  <a16:creationId xmlns="" xmlns:a16="http://schemas.microsoft.com/office/drawing/2014/main" id="{1412E771-D77B-ECB3-A7F2-58C9D2290D9A}"/>
+                  <a16:creationId xmlns:a16="http://schemas.microsoft.com/office/drawing/2014/main" id="{1412E771-D77B-ECB3-A7F2-58C9D2290D9A}"/>
                 </a:ext>
               </a:extLst>
             </p:cNvPr>
@@ -1329,7 +1330,7 @@
             <p:cNvPr id="15" name="그림 14">
               <a:extLst>
                 <a:ext uri="{FF2B5EF4-FFF2-40B4-BE49-F238E27FC236}">
-                  <a16:creationId xmlns="" xmlns:a16="http://schemas.microsoft.com/office/drawing/2014/main" id="{A56376D0-40ED-39FF-626A-D176C919A55A}"/>
+                  <a16:creationId xmlns:a16="http://schemas.microsoft.com/office/drawing/2014/main" id="{A56376D0-40ED-39FF-626A-D176C919A55A}"/>
                 </a:ext>
               </a:extLst>
             </p:cNvPr>
@@ -1374,7 +1375,7 @@
             <p:cNvPr id="16" name="그림 15">
               <a:extLst>
                 <a:ext uri="{FF2B5EF4-FFF2-40B4-BE49-F238E27FC236}">
-                  <a16:creationId xmlns="" xmlns:a16="http://schemas.microsoft.com/office/drawing/2014/main" id="{C41382C8-2F4E-B439-D83B-BD1EB986D7D4}"/>
+                  <a16:creationId xmlns:a16="http://schemas.microsoft.com/office/drawing/2014/main" id="{C41382C8-2F4E-B439-D83B-BD1EB986D7D4}"/>
                 </a:ext>
               </a:extLst>
             </p:cNvPr>
@@ -1420,7 +1421,7 @@
           <p:cNvPr id="9" name="직사각형 8">
             <a:extLst>
               <a:ext uri="{FF2B5EF4-FFF2-40B4-BE49-F238E27FC236}">
-                <a16:creationId xmlns="" xmlns:a16="http://schemas.microsoft.com/office/drawing/2014/main" id="{51864EE2-0E3F-5F2B-A824-5B5952D85500}"/>
+                <a16:creationId xmlns:a16="http://schemas.microsoft.com/office/drawing/2014/main" id="{51864EE2-0E3F-5F2B-A824-5B5952D85500}"/>
               </a:ext>
             </a:extLst>
           </p:cNvPr>
@@ -1474,7 +1475,7 @@
           <p:cNvPr id="17" name="그룹 16">
             <a:extLst>
               <a:ext uri="{FF2B5EF4-FFF2-40B4-BE49-F238E27FC236}">
-                <a16:creationId xmlns="" xmlns:a16="http://schemas.microsoft.com/office/drawing/2014/main" id="{AAE473E8-A101-8978-DE78-77F4666441E6}"/>
+                <a16:creationId xmlns:a16="http://schemas.microsoft.com/office/drawing/2014/main" id="{AAE473E8-A101-8978-DE78-77F4666441E6}"/>
               </a:ext>
             </a:extLst>
           </p:cNvPr>
@@ -1494,7 +1495,7 @@
             <p:cNvPr id="10" name="모서리가 둥근 직사각형 17">
               <a:extLst>
                 <a:ext uri="{FF2B5EF4-FFF2-40B4-BE49-F238E27FC236}">
-                  <a16:creationId xmlns="" xmlns:a16="http://schemas.microsoft.com/office/drawing/2014/main" id="{5AC6928E-D13E-72CC-78C7-8E2954061895}"/>
+                  <a16:creationId xmlns:a16="http://schemas.microsoft.com/office/drawing/2014/main" id="{5AC6928E-D13E-72CC-78C7-8E2954061895}"/>
                 </a:ext>
               </a:extLst>
             </p:cNvPr>
@@ -1555,7 +1556,7 @@
             <p:cNvPr id="11" name="그림 10">
               <a:extLst>
                 <a:ext uri="{FF2B5EF4-FFF2-40B4-BE49-F238E27FC236}">
-                  <a16:creationId xmlns="" xmlns:a16="http://schemas.microsoft.com/office/drawing/2014/main" id="{15DB62E4-C03A-DB2E-4949-EA95ADE9D43F}"/>
+                  <a16:creationId xmlns:a16="http://schemas.microsoft.com/office/drawing/2014/main" id="{15DB62E4-C03A-DB2E-4949-EA95ADE9D43F}"/>
                 </a:ext>
               </a:extLst>
             </p:cNvPr>
@@ -1638,7 +1639,7 @@
           <p:cNvPr id="2" name="그룹 1">
             <a:extLst>
               <a:ext uri="{FF2B5EF4-FFF2-40B4-BE49-F238E27FC236}">
-                <a16:creationId xmlns="" xmlns:a16="http://schemas.microsoft.com/office/drawing/2014/main" id="{D183E31F-3955-4FBD-E8F7-90E1FD6CA3F3}"/>
+                <a16:creationId xmlns:a16="http://schemas.microsoft.com/office/drawing/2014/main" id="{D183E31F-3955-4FBD-E8F7-90E1FD6CA3F3}"/>
               </a:ext>
             </a:extLst>
           </p:cNvPr>
@@ -1658,7 +1659,7 @@
             <p:cNvPr id="3" name="직사각형 2">
               <a:extLst>
                 <a:ext uri="{FF2B5EF4-FFF2-40B4-BE49-F238E27FC236}">
-                  <a16:creationId xmlns="" xmlns:a16="http://schemas.microsoft.com/office/drawing/2014/main" id="{EFED3282-1593-35E0-0E01-708326A51663}"/>
+                  <a16:creationId xmlns:a16="http://schemas.microsoft.com/office/drawing/2014/main" id="{EFED3282-1593-35E0-0E01-708326A51663}"/>
                 </a:ext>
               </a:extLst>
             </p:cNvPr>
@@ -1710,7 +1711,7 @@
             <p:cNvPr id="4" name="그림 3">
               <a:extLst>
                 <a:ext uri="{FF2B5EF4-FFF2-40B4-BE49-F238E27FC236}">
-                  <a16:creationId xmlns="" xmlns:a16="http://schemas.microsoft.com/office/drawing/2014/main" id="{A9CE19A0-6FBE-F6F1-3EC6-F1DDE66EAB89}"/>
+                  <a16:creationId xmlns:a16="http://schemas.microsoft.com/office/drawing/2014/main" id="{A9CE19A0-6FBE-F6F1-3EC6-F1DDE66EAB89}"/>
                 </a:ext>
               </a:extLst>
             </p:cNvPr>
@@ -1747,7 +1748,7 @@
           <p:cNvPr id="5" name="그래픽 4">
             <a:extLst>
               <a:ext uri="{FF2B5EF4-FFF2-40B4-BE49-F238E27FC236}">
-                <a16:creationId xmlns="" xmlns:a16="http://schemas.microsoft.com/office/drawing/2014/main" id="{110B11E9-0619-A430-9F14-618E955A9578}"/>
+                <a16:creationId xmlns:a16="http://schemas.microsoft.com/office/drawing/2014/main" id="{110B11E9-0619-A430-9F14-618E955A9578}"/>
               </a:ext>
             </a:extLst>
           </p:cNvPr>
@@ -1760,7 +1761,7 @@
           <a:blip r:embed="rId3">
             <a:extLst>
               <a:ext uri="{96DAC541-7B7A-43D3-8B79-37D633B846F1}">
-                <asvg:svgBlip xmlns="" xmlns:asvg="http://schemas.microsoft.com/office/drawing/2016/SVG/main" r:embed="rId4"/>
+                <asvg:svgBlip xmlns:asvg="http://schemas.microsoft.com/office/drawing/2016/SVG/main" xmlns="" r:embed="rId4"/>
               </a:ext>
             </a:extLst>
           </a:blip>
@@ -1783,7 +1784,7 @@
           <p:cNvPr id="7" name="Rectangle 17">
             <a:extLst>
               <a:ext uri="{FF2B5EF4-FFF2-40B4-BE49-F238E27FC236}">
-                <a16:creationId xmlns="" xmlns:a16="http://schemas.microsoft.com/office/drawing/2014/main" id="{127153B7-D347-9C66-1263-12BEE8369889}"/>
+                <a16:creationId xmlns:a16="http://schemas.microsoft.com/office/drawing/2014/main" id="{127153B7-D347-9C66-1263-12BEE8369889}"/>
               </a:ext>
             </a:extLst>
           </p:cNvPr>
@@ -1928,7 +1929,7 @@
           <p:cNvPr id="2" name="그룹 1">
             <a:extLst>
               <a:ext uri="{FF2B5EF4-FFF2-40B4-BE49-F238E27FC236}">
-                <a16:creationId xmlns="" xmlns:a16="http://schemas.microsoft.com/office/drawing/2014/main" id="{A2BD2282-4948-B455-F8D7-857E85B9B702}"/>
+                <a16:creationId xmlns:a16="http://schemas.microsoft.com/office/drawing/2014/main" id="{A2BD2282-4948-B455-F8D7-857E85B9B702}"/>
               </a:ext>
             </a:extLst>
           </p:cNvPr>
@@ -1948,7 +1949,7 @@
             <p:cNvPr id="3" name="그림 2">
               <a:extLst>
                 <a:ext uri="{FF2B5EF4-FFF2-40B4-BE49-F238E27FC236}">
-                  <a16:creationId xmlns="" xmlns:a16="http://schemas.microsoft.com/office/drawing/2014/main" id="{60BB8BA0-1EC0-1370-707D-98428F5957CA}"/>
+                  <a16:creationId xmlns:a16="http://schemas.microsoft.com/office/drawing/2014/main" id="{60BB8BA0-1EC0-1370-707D-98428F5957CA}"/>
                 </a:ext>
               </a:extLst>
             </p:cNvPr>
@@ -1993,7 +1994,7 @@
             <p:cNvPr id="4" name="그림 3">
               <a:extLst>
                 <a:ext uri="{FF2B5EF4-FFF2-40B4-BE49-F238E27FC236}">
-                  <a16:creationId xmlns="" xmlns:a16="http://schemas.microsoft.com/office/drawing/2014/main" id="{3A186660-74F2-B3C8-0D62-C6876BF6FA92}"/>
+                  <a16:creationId xmlns:a16="http://schemas.microsoft.com/office/drawing/2014/main" id="{3A186660-74F2-B3C8-0D62-C6876BF6FA92}"/>
                 </a:ext>
               </a:extLst>
             </p:cNvPr>
@@ -2038,7 +2039,7 @@
             <p:cNvPr id="5" name="그림 4">
               <a:extLst>
                 <a:ext uri="{FF2B5EF4-FFF2-40B4-BE49-F238E27FC236}">
-                  <a16:creationId xmlns="" xmlns:a16="http://schemas.microsoft.com/office/drawing/2014/main" id="{0CA24E20-D1E2-4576-98AE-914E48408A54}"/>
+                  <a16:creationId xmlns:a16="http://schemas.microsoft.com/office/drawing/2014/main" id="{0CA24E20-D1E2-4576-98AE-914E48408A54}"/>
                 </a:ext>
               </a:extLst>
             </p:cNvPr>
@@ -2083,7 +2084,7 @@
             <p:cNvPr id="6" name="그림 5">
               <a:extLst>
                 <a:ext uri="{FF2B5EF4-FFF2-40B4-BE49-F238E27FC236}">
-                  <a16:creationId xmlns="" xmlns:a16="http://schemas.microsoft.com/office/drawing/2014/main" id="{0ADED49D-93B5-807D-68D5-B23CDEB9DFED}"/>
+                  <a16:creationId xmlns:a16="http://schemas.microsoft.com/office/drawing/2014/main" id="{0ADED49D-93B5-807D-68D5-B23CDEB9DFED}"/>
                 </a:ext>
               </a:extLst>
             </p:cNvPr>
@@ -2128,7 +2129,7 @@
             <p:cNvPr id="7" name="그림 6">
               <a:extLst>
                 <a:ext uri="{FF2B5EF4-FFF2-40B4-BE49-F238E27FC236}">
-                  <a16:creationId xmlns="" xmlns:a16="http://schemas.microsoft.com/office/drawing/2014/main" id="{9F00F7E7-8BD6-E04A-3243-598FEF376ED1}"/>
+                  <a16:creationId xmlns:a16="http://schemas.microsoft.com/office/drawing/2014/main" id="{9F00F7E7-8BD6-E04A-3243-598FEF376ED1}"/>
                 </a:ext>
               </a:extLst>
             </p:cNvPr>
@@ -2174,7 +2175,7 @@
           <p:cNvPr id="8" name="그룹 7">
             <a:extLst>
               <a:ext uri="{FF2B5EF4-FFF2-40B4-BE49-F238E27FC236}">
-                <a16:creationId xmlns="" xmlns:a16="http://schemas.microsoft.com/office/drawing/2014/main" id="{BDCAEAFE-4E9F-1115-0EDC-56E5973CE66D}"/>
+                <a16:creationId xmlns:a16="http://schemas.microsoft.com/office/drawing/2014/main" id="{BDCAEAFE-4E9F-1115-0EDC-56E5973CE66D}"/>
               </a:ext>
             </a:extLst>
           </p:cNvPr>
@@ -2194,7 +2195,7 @@
             <p:cNvPr id="9" name="그림 8">
               <a:extLst>
                 <a:ext uri="{FF2B5EF4-FFF2-40B4-BE49-F238E27FC236}">
-                  <a16:creationId xmlns="" xmlns:a16="http://schemas.microsoft.com/office/drawing/2014/main" id="{29564B14-916D-8658-99C6-CAB154D7CB3D}"/>
+                  <a16:creationId xmlns:a16="http://schemas.microsoft.com/office/drawing/2014/main" id="{29564B14-916D-8658-99C6-CAB154D7CB3D}"/>
                 </a:ext>
               </a:extLst>
             </p:cNvPr>
@@ -2239,7 +2240,7 @@
             <p:cNvPr id="10" name="그림 9">
               <a:extLst>
                 <a:ext uri="{FF2B5EF4-FFF2-40B4-BE49-F238E27FC236}">
-                  <a16:creationId xmlns="" xmlns:a16="http://schemas.microsoft.com/office/drawing/2014/main" id="{45B769E7-735C-ED2C-14ED-0A7548BB1529}"/>
+                  <a16:creationId xmlns:a16="http://schemas.microsoft.com/office/drawing/2014/main" id="{45B769E7-735C-ED2C-14ED-0A7548BB1529}"/>
                 </a:ext>
               </a:extLst>
             </p:cNvPr>
@@ -2284,7 +2285,7 @@
             <p:cNvPr id="11" name="그림 10">
               <a:extLst>
                 <a:ext uri="{FF2B5EF4-FFF2-40B4-BE49-F238E27FC236}">
-                  <a16:creationId xmlns="" xmlns:a16="http://schemas.microsoft.com/office/drawing/2014/main" id="{542F71E4-9328-1B5E-5A06-94C2312A65FC}"/>
+                  <a16:creationId xmlns:a16="http://schemas.microsoft.com/office/drawing/2014/main" id="{542F71E4-9328-1B5E-5A06-94C2312A65FC}"/>
                 </a:ext>
               </a:extLst>
             </p:cNvPr>
@@ -2329,7 +2330,7 @@
             <p:cNvPr id="12" name="그림 11">
               <a:extLst>
                 <a:ext uri="{FF2B5EF4-FFF2-40B4-BE49-F238E27FC236}">
-                  <a16:creationId xmlns="" xmlns:a16="http://schemas.microsoft.com/office/drawing/2014/main" id="{AD0B168B-F0A8-ABA6-3D87-B9473411E4DD}"/>
+                  <a16:creationId xmlns:a16="http://schemas.microsoft.com/office/drawing/2014/main" id="{AD0B168B-F0A8-ABA6-3D87-B9473411E4DD}"/>
                 </a:ext>
               </a:extLst>
             </p:cNvPr>
@@ -2374,7 +2375,7 @@
             <p:cNvPr id="13" name="그림 12">
               <a:extLst>
                 <a:ext uri="{FF2B5EF4-FFF2-40B4-BE49-F238E27FC236}">
-                  <a16:creationId xmlns="" xmlns:a16="http://schemas.microsoft.com/office/drawing/2014/main" id="{6BB75738-319C-5D11-37FB-01605FD0CC9C}"/>
+                  <a16:creationId xmlns:a16="http://schemas.microsoft.com/office/drawing/2014/main" id="{6BB75738-319C-5D11-37FB-01605FD0CC9C}"/>
                 </a:ext>
               </a:extLst>
             </p:cNvPr>
@@ -2466,7 +2467,7 @@
           <p:cNvPr id="3" name="그래픽 2">
             <a:extLst>
               <a:ext uri="{FF2B5EF4-FFF2-40B4-BE49-F238E27FC236}">
-                <a16:creationId xmlns="" xmlns:a16="http://schemas.microsoft.com/office/drawing/2014/main" id="{759D03FC-04A1-8FC3-B712-FD0DBF633CD8}"/>
+                <a16:creationId xmlns:a16="http://schemas.microsoft.com/office/drawing/2014/main" id="{759D03FC-04A1-8FC3-B712-FD0DBF633CD8}"/>
               </a:ext>
             </a:extLst>
           </p:cNvPr>
@@ -2479,7 +2480,7 @@
           <a:blip r:embed="rId2">
             <a:extLst>
               <a:ext uri="{96DAC541-7B7A-43D3-8B79-37D633B846F1}">
-                <asvg:svgBlip xmlns="" xmlns:asvg="http://schemas.microsoft.com/office/drawing/2016/SVG/main" r:embed="rId3"/>
+                <asvg:svgBlip xmlns:asvg="http://schemas.microsoft.com/office/drawing/2016/SVG/main" xmlns="" r:embed="rId3"/>
               </a:ext>
             </a:extLst>
           </a:blip>
@@ -2532,7 +2533,7 @@
           <p:cNvPr id="7" name="그래픽 6">
             <a:extLst>
               <a:ext uri="{FF2B5EF4-FFF2-40B4-BE49-F238E27FC236}">
-                <a16:creationId xmlns="" xmlns:a16="http://schemas.microsoft.com/office/drawing/2014/main" id="{C4C42A3F-2847-32F5-6A68-FB68460F0322}"/>
+                <a16:creationId xmlns:a16="http://schemas.microsoft.com/office/drawing/2014/main" id="{C4C42A3F-2847-32F5-6A68-FB68460F0322}"/>
               </a:ext>
             </a:extLst>
           </p:cNvPr>
@@ -2545,7 +2546,7 @@
           <a:blip r:embed="rId2">
             <a:extLst>
               <a:ext uri="{96DAC541-7B7A-43D3-8B79-37D633B846F1}">
-                <asvg:svgBlip xmlns="" xmlns:asvg="http://schemas.microsoft.com/office/drawing/2016/SVG/main" r:embed="rId3"/>
+                <asvg:svgBlip xmlns:asvg="http://schemas.microsoft.com/office/drawing/2016/SVG/main" xmlns="" r:embed="rId3"/>
               </a:ext>
             </a:extLst>
           </a:blip>
@@ -2598,7 +2599,7 @@
           <p:cNvPr id="10" name="그래픽 9">
             <a:extLst>
               <a:ext uri="{FF2B5EF4-FFF2-40B4-BE49-F238E27FC236}">
-                <a16:creationId xmlns="" xmlns:a16="http://schemas.microsoft.com/office/drawing/2014/main" id="{AAB1B483-AD5F-E9AA-AFDA-2F5456AEE8A9}"/>
+                <a16:creationId xmlns:a16="http://schemas.microsoft.com/office/drawing/2014/main" id="{AAB1B483-AD5F-E9AA-AFDA-2F5456AEE8A9}"/>
               </a:ext>
             </a:extLst>
           </p:cNvPr>
@@ -2611,7 +2612,7 @@
           <a:blip r:embed="rId2">
             <a:extLst>
               <a:ext uri="{96DAC541-7B7A-43D3-8B79-37D633B846F1}">
-                <asvg:svgBlip xmlns="" xmlns:asvg="http://schemas.microsoft.com/office/drawing/2016/SVG/main" r:embed="rId3"/>
+                <asvg:svgBlip xmlns:asvg="http://schemas.microsoft.com/office/drawing/2016/SVG/main" xmlns="" r:embed="rId3"/>
               </a:ext>
             </a:extLst>
           </a:blip>
@@ -2664,7 +2665,7 @@
           <p:cNvPr id="8" name="그래픽 7">
             <a:extLst>
               <a:ext uri="{FF2B5EF4-FFF2-40B4-BE49-F238E27FC236}">
-                <a16:creationId xmlns="" xmlns:a16="http://schemas.microsoft.com/office/drawing/2014/main" id="{F852F2B8-A7D4-43F2-4133-299E0BABBE59}"/>
+                <a16:creationId xmlns:a16="http://schemas.microsoft.com/office/drawing/2014/main" id="{F852F2B8-A7D4-43F2-4133-299E0BABBE59}"/>
               </a:ext>
             </a:extLst>
           </p:cNvPr>
@@ -2677,7 +2678,7 @@
           <a:blip r:embed="rId2">
             <a:extLst>
               <a:ext uri="{96DAC541-7B7A-43D3-8B79-37D633B846F1}">
-                <asvg:svgBlip xmlns="" xmlns:asvg="http://schemas.microsoft.com/office/drawing/2016/SVG/main" r:embed="rId3"/>
+                <asvg:svgBlip xmlns:asvg="http://schemas.microsoft.com/office/drawing/2016/SVG/main" xmlns="" r:embed="rId3"/>
               </a:ext>
             </a:extLst>
           </a:blip>
@@ -2700,7 +2701,7 @@
           <p:cNvPr id="19" name="그래픽 18">
             <a:extLst>
               <a:ext uri="{FF2B5EF4-FFF2-40B4-BE49-F238E27FC236}">
-                <a16:creationId xmlns="" xmlns:a16="http://schemas.microsoft.com/office/drawing/2014/main" id="{49814FA4-1342-78BD-4976-A008A47ACCA1}"/>
+                <a16:creationId xmlns:a16="http://schemas.microsoft.com/office/drawing/2014/main" id="{49814FA4-1342-78BD-4976-A008A47ACCA1}"/>
               </a:ext>
             </a:extLst>
           </p:cNvPr>
@@ -2713,7 +2714,7 @@
           <a:blip r:embed="rId4">
             <a:extLst>
               <a:ext uri="{96DAC541-7B7A-43D3-8B79-37D633B846F1}">
-                <asvg:svgBlip xmlns="" xmlns:asvg="http://schemas.microsoft.com/office/drawing/2016/SVG/main" r:embed="rId5"/>
+                <asvg:svgBlip xmlns:asvg="http://schemas.microsoft.com/office/drawing/2016/SVG/main" xmlns="" r:embed="rId5"/>
               </a:ext>
             </a:extLst>
           </a:blip>
@@ -2735,7 +2736,7 @@
           <p:cNvPr id="22" name="Rectangle 17">
             <a:extLst>
               <a:ext uri="{FF2B5EF4-FFF2-40B4-BE49-F238E27FC236}">
-                <a16:creationId xmlns="" xmlns:a16="http://schemas.microsoft.com/office/drawing/2014/main" id="{0406F4DB-34B4-C533-625B-4DB25C1F9F46}"/>
+                <a16:creationId xmlns:a16="http://schemas.microsoft.com/office/drawing/2014/main" id="{0406F4DB-34B4-C533-625B-4DB25C1F9F46}"/>
               </a:ext>
             </a:extLst>
           </p:cNvPr>
@@ -2884,7 +2885,7 @@
           <p:cNvPr id="2" name="제목 1">
             <a:extLst>
               <a:ext uri="{FF2B5EF4-FFF2-40B4-BE49-F238E27FC236}">
-                <a16:creationId xmlns="" xmlns:a16="http://schemas.microsoft.com/office/drawing/2014/main" id="{4A2D1AE4-313C-D4D3-8363-80A9416FE35A}"/>
+                <a16:creationId xmlns:a16="http://schemas.microsoft.com/office/drawing/2014/main" id="{4A2D1AE4-313C-D4D3-8363-80A9416FE35A}"/>
               </a:ext>
             </a:extLst>
           </p:cNvPr>
@@ -2912,7 +2913,7 @@
           <p:cNvPr id="3" name="날짜 개체 틀 2">
             <a:extLst>
               <a:ext uri="{FF2B5EF4-FFF2-40B4-BE49-F238E27FC236}">
-                <a16:creationId xmlns="" xmlns:a16="http://schemas.microsoft.com/office/drawing/2014/main" id="{99A4BE93-DCE2-128D-9B01-9A8F759A360A}"/>
+                <a16:creationId xmlns:a16="http://schemas.microsoft.com/office/drawing/2014/main" id="{99A4BE93-DCE2-128D-9B01-9A8F759A360A}"/>
               </a:ext>
             </a:extLst>
           </p:cNvPr>
@@ -2937,7 +2938,7 @@
           <p:cNvPr id="4" name="바닥글 개체 틀 3">
             <a:extLst>
               <a:ext uri="{FF2B5EF4-FFF2-40B4-BE49-F238E27FC236}">
-                <a16:creationId xmlns="" xmlns:a16="http://schemas.microsoft.com/office/drawing/2014/main" id="{C03EF455-6D32-1A47-FC68-C95E2962FA3C}"/>
+                <a16:creationId xmlns:a16="http://schemas.microsoft.com/office/drawing/2014/main" id="{C03EF455-6D32-1A47-FC68-C95E2962FA3C}"/>
               </a:ext>
             </a:extLst>
           </p:cNvPr>
@@ -2962,7 +2963,7 @@
           <p:cNvPr id="5" name="슬라이드 번호 개체 틀 4">
             <a:extLst>
               <a:ext uri="{FF2B5EF4-FFF2-40B4-BE49-F238E27FC236}">
-                <a16:creationId xmlns="" xmlns:a16="http://schemas.microsoft.com/office/drawing/2014/main" id="{22D19E34-FEE2-50BB-6E10-DB6EBCE32852}"/>
+                <a16:creationId xmlns:a16="http://schemas.microsoft.com/office/drawing/2014/main" id="{22D19E34-FEE2-50BB-6E10-DB6EBCE32852}"/>
               </a:ext>
             </a:extLst>
           </p:cNvPr>
@@ -3021,7 +3022,7 @@
           <p:cNvPr id="7" name="그룹 6">
             <a:extLst>
               <a:ext uri="{FF2B5EF4-FFF2-40B4-BE49-F238E27FC236}">
-                <a16:creationId xmlns="" xmlns:a16="http://schemas.microsoft.com/office/drawing/2014/main" id="{7E12B188-C296-3553-5380-C11C24BEA2BB}"/>
+                <a16:creationId xmlns:a16="http://schemas.microsoft.com/office/drawing/2014/main" id="{7E12B188-C296-3553-5380-C11C24BEA2BB}"/>
               </a:ext>
             </a:extLst>
           </p:cNvPr>
@@ -3041,7 +3042,7 @@
             <p:cNvPr id="8" name="그래픽 7">
               <a:extLst>
                 <a:ext uri="{FF2B5EF4-FFF2-40B4-BE49-F238E27FC236}">
-                  <a16:creationId xmlns="" xmlns:a16="http://schemas.microsoft.com/office/drawing/2014/main" id="{4D68487C-BA37-5401-5470-A1489398EE9C}"/>
+                  <a16:creationId xmlns:a16="http://schemas.microsoft.com/office/drawing/2014/main" id="{4D68487C-BA37-5401-5470-A1489398EE9C}"/>
                 </a:ext>
               </a:extLst>
             </p:cNvPr>
@@ -3054,7 +3055,7 @@
             <a:blip r:embed="rId2">
               <a:extLst>
                 <a:ext uri="{96DAC541-7B7A-43D3-8B79-37D633B846F1}">
-                  <asvg:svgBlip xmlns="" xmlns:asvg="http://schemas.microsoft.com/office/drawing/2016/SVG/main" r:embed="rId3"/>
+                  <asvg:svgBlip xmlns:asvg="http://schemas.microsoft.com/office/drawing/2016/SVG/main" xmlns="" r:embed="rId3"/>
                 </a:ext>
               </a:extLst>
             </a:blip>
@@ -3077,7 +3078,7 @@
             <p:cNvPr id="9" name="그래픽 8">
               <a:extLst>
                 <a:ext uri="{FF2B5EF4-FFF2-40B4-BE49-F238E27FC236}">
-                  <a16:creationId xmlns="" xmlns:a16="http://schemas.microsoft.com/office/drawing/2014/main" id="{E45671A3-A304-75FB-CD95-E01C1C3460FD}"/>
+                  <a16:creationId xmlns:a16="http://schemas.microsoft.com/office/drawing/2014/main" id="{E45671A3-A304-75FB-CD95-E01C1C3460FD}"/>
                 </a:ext>
               </a:extLst>
             </p:cNvPr>
@@ -3090,7 +3091,7 @@
             <a:blip r:embed="rId4">
               <a:extLst>
                 <a:ext uri="{96DAC541-7B7A-43D3-8B79-37D633B846F1}">
-                  <asvg:svgBlip xmlns="" xmlns:asvg="http://schemas.microsoft.com/office/drawing/2016/SVG/main" r:embed="rId5"/>
+                  <asvg:svgBlip xmlns:asvg="http://schemas.microsoft.com/office/drawing/2016/SVG/main" xmlns="" r:embed="rId5"/>
                 </a:ext>
               </a:extLst>
             </a:blip>
@@ -3113,7 +3114,7 @@
             <p:cNvPr id="10" name="타원 9">
               <a:extLst>
                 <a:ext uri="{FF2B5EF4-FFF2-40B4-BE49-F238E27FC236}">
-                  <a16:creationId xmlns="" xmlns:a16="http://schemas.microsoft.com/office/drawing/2014/main" id="{44A83AE3-956E-F6D8-F0E3-495DE6B871F4}"/>
+                  <a16:creationId xmlns:a16="http://schemas.microsoft.com/office/drawing/2014/main" id="{44A83AE3-956E-F6D8-F0E3-495DE6B871F4}"/>
                 </a:ext>
               </a:extLst>
             </p:cNvPr>
@@ -3165,7 +3166,7 @@
             <p:cNvPr id="11" name="직사각형 10">
               <a:extLst>
                 <a:ext uri="{FF2B5EF4-FFF2-40B4-BE49-F238E27FC236}">
-                  <a16:creationId xmlns="" xmlns:a16="http://schemas.microsoft.com/office/drawing/2014/main" id="{397662AE-D8B7-D6BA-4E25-8850A9FA4714}"/>
+                  <a16:creationId xmlns:a16="http://schemas.microsoft.com/office/drawing/2014/main" id="{397662AE-D8B7-D6BA-4E25-8850A9FA4714}"/>
                 </a:ext>
               </a:extLst>
             </p:cNvPr>
@@ -3219,7 +3220,7 @@
             <p:cNvPr id="12" name="그래픽 11">
               <a:extLst>
                 <a:ext uri="{FF2B5EF4-FFF2-40B4-BE49-F238E27FC236}">
-                  <a16:creationId xmlns="" xmlns:a16="http://schemas.microsoft.com/office/drawing/2014/main" id="{65FC18EB-CF1C-C0C4-3FCA-48E855FA7911}"/>
+                  <a16:creationId xmlns:a16="http://schemas.microsoft.com/office/drawing/2014/main" id="{65FC18EB-CF1C-C0C4-3FCA-48E855FA7911}"/>
                 </a:ext>
               </a:extLst>
             </p:cNvPr>
@@ -3232,7 +3233,7 @@
             <a:blip r:embed="rId6">
               <a:extLst>
                 <a:ext uri="{96DAC541-7B7A-43D3-8B79-37D633B846F1}">
-                  <asvg:svgBlip xmlns="" xmlns:asvg="http://schemas.microsoft.com/office/drawing/2016/SVG/main" r:embed="rId7"/>
+                  <asvg:svgBlip xmlns:asvg="http://schemas.microsoft.com/office/drawing/2016/SVG/main" xmlns="" r:embed="rId7"/>
                 </a:ext>
               </a:extLst>
             </a:blip>
@@ -3302,7 +3303,7 @@
           <p:cNvPr id="2" name="날짜 개체 틀 1">
             <a:extLst>
               <a:ext uri="{FF2B5EF4-FFF2-40B4-BE49-F238E27FC236}">
-                <a16:creationId xmlns="" xmlns:a16="http://schemas.microsoft.com/office/drawing/2014/main" id="{9926945D-2F31-77DD-B55C-E5A2668F5372}"/>
+                <a16:creationId xmlns:a16="http://schemas.microsoft.com/office/drawing/2014/main" id="{9926945D-2F31-77DD-B55C-E5A2668F5372}"/>
               </a:ext>
             </a:extLst>
           </p:cNvPr>
@@ -3327,7 +3328,7 @@
           <p:cNvPr id="3" name="바닥글 개체 틀 2">
             <a:extLst>
               <a:ext uri="{FF2B5EF4-FFF2-40B4-BE49-F238E27FC236}">
-                <a16:creationId xmlns="" xmlns:a16="http://schemas.microsoft.com/office/drawing/2014/main" id="{67779EB4-5A1F-0364-04A0-FCE8D2C9BD4A}"/>
+                <a16:creationId xmlns:a16="http://schemas.microsoft.com/office/drawing/2014/main" id="{67779EB4-5A1F-0364-04A0-FCE8D2C9BD4A}"/>
               </a:ext>
             </a:extLst>
           </p:cNvPr>
@@ -3352,7 +3353,7 @@
           <p:cNvPr id="4" name="슬라이드 번호 개체 틀 3">
             <a:extLst>
               <a:ext uri="{FF2B5EF4-FFF2-40B4-BE49-F238E27FC236}">
-                <a16:creationId xmlns="" xmlns:a16="http://schemas.microsoft.com/office/drawing/2014/main" id="{7649ACE9-0010-4ECC-BB2D-94DE880283F6}"/>
+                <a16:creationId xmlns:a16="http://schemas.microsoft.com/office/drawing/2014/main" id="{7649ACE9-0010-4ECC-BB2D-94DE880283F6}"/>
               </a:ext>
             </a:extLst>
           </p:cNvPr>
@@ -3411,7 +3412,7 @@
           <p:cNvPr id="2" name="제목 1">
             <a:extLst>
               <a:ext uri="{FF2B5EF4-FFF2-40B4-BE49-F238E27FC236}">
-                <a16:creationId xmlns="" xmlns:a16="http://schemas.microsoft.com/office/drawing/2014/main" id="{D654359D-FEC0-DF3A-66AB-6193EAEB294C}"/>
+                <a16:creationId xmlns:a16="http://schemas.microsoft.com/office/drawing/2014/main" id="{D654359D-FEC0-DF3A-66AB-6193EAEB294C}"/>
               </a:ext>
             </a:extLst>
           </p:cNvPr>
@@ -3448,7 +3449,7 @@
           <p:cNvPr id="3" name="내용 개체 틀 2">
             <a:extLst>
               <a:ext uri="{FF2B5EF4-FFF2-40B4-BE49-F238E27FC236}">
-                <a16:creationId xmlns="" xmlns:a16="http://schemas.microsoft.com/office/drawing/2014/main" id="{0ACA72CA-C1C7-6436-6F11-E0F69619CAE8}"/>
+                <a16:creationId xmlns:a16="http://schemas.microsoft.com/office/drawing/2014/main" id="{0ACA72CA-C1C7-6436-6F11-E0F69619CAE8}"/>
               </a:ext>
             </a:extLst>
           </p:cNvPr>
@@ -3538,7 +3539,7 @@
           <p:cNvPr id="4" name="텍스트 개체 틀 3">
             <a:extLst>
               <a:ext uri="{FF2B5EF4-FFF2-40B4-BE49-F238E27FC236}">
-                <a16:creationId xmlns="" xmlns:a16="http://schemas.microsoft.com/office/drawing/2014/main" id="{42DAE31C-5D53-3AF0-4BAF-90F4798B1C90}"/>
+                <a16:creationId xmlns:a16="http://schemas.microsoft.com/office/drawing/2014/main" id="{42DAE31C-5D53-3AF0-4BAF-90F4798B1C90}"/>
               </a:ext>
             </a:extLst>
           </p:cNvPr>
@@ -3609,7 +3610,7 @@
           <p:cNvPr id="5" name="날짜 개체 틀 4">
             <a:extLst>
               <a:ext uri="{FF2B5EF4-FFF2-40B4-BE49-F238E27FC236}">
-                <a16:creationId xmlns="" xmlns:a16="http://schemas.microsoft.com/office/drawing/2014/main" id="{F44EB1AA-2DB6-5B26-F881-D19354F074FA}"/>
+                <a16:creationId xmlns:a16="http://schemas.microsoft.com/office/drawing/2014/main" id="{F44EB1AA-2DB6-5B26-F881-D19354F074FA}"/>
               </a:ext>
             </a:extLst>
           </p:cNvPr>
@@ -3634,7 +3635,7 @@
           <p:cNvPr id="6" name="바닥글 개체 틀 5">
             <a:extLst>
               <a:ext uri="{FF2B5EF4-FFF2-40B4-BE49-F238E27FC236}">
-                <a16:creationId xmlns="" xmlns:a16="http://schemas.microsoft.com/office/drawing/2014/main" id="{712AE34F-9328-F0FC-BAAD-BD3C627B170F}"/>
+                <a16:creationId xmlns:a16="http://schemas.microsoft.com/office/drawing/2014/main" id="{712AE34F-9328-F0FC-BAAD-BD3C627B170F}"/>
               </a:ext>
             </a:extLst>
           </p:cNvPr>
@@ -3659,7 +3660,7 @@
           <p:cNvPr id="7" name="슬라이드 번호 개체 틀 6">
             <a:extLst>
               <a:ext uri="{FF2B5EF4-FFF2-40B4-BE49-F238E27FC236}">
-                <a16:creationId xmlns="" xmlns:a16="http://schemas.microsoft.com/office/drawing/2014/main" id="{BDA15D60-463A-D411-E3BB-EDEB951BF26C}"/>
+                <a16:creationId xmlns:a16="http://schemas.microsoft.com/office/drawing/2014/main" id="{BDA15D60-463A-D411-E3BB-EDEB951BF26C}"/>
               </a:ext>
             </a:extLst>
           </p:cNvPr>
@@ -3718,7 +3719,7 @@
           <p:cNvPr id="2" name="제목 1">
             <a:extLst>
               <a:ext uri="{FF2B5EF4-FFF2-40B4-BE49-F238E27FC236}">
-                <a16:creationId xmlns="" xmlns:a16="http://schemas.microsoft.com/office/drawing/2014/main" id="{66D34A16-B882-858D-9D2B-2689BF935DE6}"/>
+                <a16:creationId xmlns:a16="http://schemas.microsoft.com/office/drawing/2014/main" id="{66D34A16-B882-858D-9D2B-2689BF935DE6}"/>
               </a:ext>
             </a:extLst>
           </p:cNvPr>
@@ -3755,7 +3756,7 @@
           <p:cNvPr id="3" name="그림 개체 틀 2">
             <a:extLst>
               <a:ext uri="{FF2B5EF4-FFF2-40B4-BE49-F238E27FC236}">
-                <a16:creationId xmlns="" xmlns:a16="http://schemas.microsoft.com/office/drawing/2014/main" id="{770763FB-FF90-B15D-491F-1AA1C42DA5DB}"/>
+                <a16:creationId xmlns:a16="http://schemas.microsoft.com/office/drawing/2014/main" id="{770763FB-FF90-B15D-491F-1AA1C42DA5DB}"/>
               </a:ext>
             </a:extLst>
           </p:cNvPr>
@@ -3822,7 +3823,7 @@
           <p:cNvPr id="4" name="텍스트 개체 틀 3">
             <a:extLst>
               <a:ext uri="{FF2B5EF4-FFF2-40B4-BE49-F238E27FC236}">
-                <a16:creationId xmlns="" xmlns:a16="http://schemas.microsoft.com/office/drawing/2014/main" id="{0D4D7976-09E7-B036-11DF-5087FA866273}"/>
+                <a16:creationId xmlns:a16="http://schemas.microsoft.com/office/drawing/2014/main" id="{0D4D7976-09E7-B036-11DF-5087FA866273}"/>
               </a:ext>
             </a:extLst>
           </p:cNvPr>
@@ -3893,7 +3894,7 @@
           <p:cNvPr id="5" name="날짜 개체 틀 4">
             <a:extLst>
               <a:ext uri="{FF2B5EF4-FFF2-40B4-BE49-F238E27FC236}">
-                <a16:creationId xmlns="" xmlns:a16="http://schemas.microsoft.com/office/drawing/2014/main" id="{6D3A7B59-44F4-26F5-15FE-D476E94B3D58}"/>
+                <a16:creationId xmlns:a16="http://schemas.microsoft.com/office/drawing/2014/main" id="{6D3A7B59-44F4-26F5-15FE-D476E94B3D58}"/>
               </a:ext>
             </a:extLst>
           </p:cNvPr>
@@ -3918,7 +3919,7 @@
           <p:cNvPr id="6" name="바닥글 개체 틀 5">
             <a:extLst>
               <a:ext uri="{FF2B5EF4-FFF2-40B4-BE49-F238E27FC236}">
-                <a16:creationId xmlns="" xmlns:a16="http://schemas.microsoft.com/office/drawing/2014/main" id="{F4BE175F-56D0-7856-D94A-A57E7918033C}"/>
+                <a16:creationId xmlns:a16="http://schemas.microsoft.com/office/drawing/2014/main" id="{F4BE175F-56D0-7856-D94A-A57E7918033C}"/>
               </a:ext>
             </a:extLst>
           </p:cNvPr>
@@ -3943,7 +3944,7 @@
           <p:cNvPr id="7" name="슬라이드 번호 개체 틀 6">
             <a:extLst>
               <a:ext uri="{FF2B5EF4-FFF2-40B4-BE49-F238E27FC236}">
-                <a16:creationId xmlns="" xmlns:a16="http://schemas.microsoft.com/office/drawing/2014/main" id="{A11468A0-C545-C993-1B94-E231212E9A72}"/>
+                <a16:creationId xmlns:a16="http://schemas.microsoft.com/office/drawing/2014/main" id="{A11468A0-C545-C993-1B94-E231212E9A72}"/>
               </a:ext>
             </a:extLst>
           </p:cNvPr>
@@ -4002,7 +4003,7 @@
           <p:cNvPr id="2" name="제목 1">
             <a:extLst>
               <a:ext uri="{FF2B5EF4-FFF2-40B4-BE49-F238E27FC236}">
-                <a16:creationId xmlns="" xmlns:a16="http://schemas.microsoft.com/office/drawing/2014/main" id="{7041A987-C28D-D65B-0C97-64DA3AED46C5}"/>
+                <a16:creationId xmlns:a16="http://schemas.microsoft.com/office/drawing/2014/main" id="{7041A987-C28D-D65B-0C97-64DA3AED46C5}"/>
               </a:ext>
             </a:extLst>
           </p:cNvPr>
@@ -4030,7 +4031,7 @@
           <p:cNvPr id="3" name="세로 텍스트 개체 틀 2">
             <a:extLst>
               <a:ext uri="{FF2B5EF4-FFF2-40B4-BE49-F238E27FC236}">
-                <a16:creationId xmlns="" xmlns:a16="http://schemas.microsoft.com/office/drawing/2014/main" id="{C3B6F40D-C04F-487C-720F-D0911B8E55AC}"/>
+                <a16:creationId xmlns:a16="http://schemas.microsoft.com/office/drawing/2014/main" id="{C3B6F40D-C04F-487C-720F-D0911B8E55AC}"/>
               </a:ext>
             </a:extLst>
           </p:cNvPr>
@@ -4087,7 +4088,7 @@
           <p:cNvPr id="4" name="날짜 개체 틀 3">
             <a:extLst>
               <a:ext uri="{FF2B5EF4-FFF2-40B4-BE49-F238E27FC236}">
-                <a16:creationId xmlns="" xmlns:a16="http://schemas.microsoft.com/office/drawing/2014/main" id="{FFF54CC3-EC81-8460-4AD4-8B4403A4BFF8}"/>
+                <a16:creationId xmlns:a16="http://schemas.microsoft.com/office/drawing/2014/main" id="{FFF54CC3-EC81-8460-4AD4-8B4403A4BFF8}"/>
               </a:ext>
             </a:extLst>
           </p:cNvPr>
@@ -4112,7 +4113,7 @@
           <p:cNvPr id="5" name="바닥글 개체 틀 4">
             <a:extLst>
               <a:ext uri="{FF2B5EF4-FFF2-40B4-BE49-F238E27FC236}">
-                <a16:creationId xmlns="" xmlns:a16="http://schemas.microsoft.com/office/drawing/2014/main" id="{6E582040-4A88-0B3C-F1D1-B02C71528BA1}"/>
+                <a16:creationId xmlns:a16="http://schemas.microsoft.com/office/drawing/2014/main" id="{6E582040-4A88-0B3C-F1D1-B02C71528BA1}"/>
               </a:ext>
             </a:extLst>
           </p:cNvPr>
@@ -4137,7 +4138,7 @@
           <p:cNvPr id="6" name="슬라이드 번호 개체 틀 5">
             <a:extLst>
               <a:ext uri="{FF2B5EF4-FFF2-40B4-BE49-F238E27FC236}">
-                <a16:creationId xmlns="" xmlns:a16="http://schemas.microsoft.com/office/drawing/2014/main" id="{A37C0129-7C70-5B4B-4815-90F67D03DFFA}"/>
+                <a16:creationId xmlns:a16="http://schemas.microsoft.com/office/drawing/2014/main" id="{A37C0129-7C70-5B4B-4815-90F67D03DFFA}"/>
               </a:ext>
             </a:extLst>
           </p:cNvPr>
@@ -4196,7 +4197,7 @@
           <p:cNvPr id="2" name="세로 제목 1">
             <a:extLst>
               <a:ext uri="{FF2B5EF4-FFF2-40B4-BE49-F238E27FC236}">
-                <a16:creationId xmlns="" xmlns:a16="http://schemas.microsoft.com/office/drawing/2014/main" id="{93F014D7-204B-A2DA-07F5-43289898F9CC}"/>
+                <a16:creationId xmlns:a16="http://schemas.microsoft.com/office/drawing/2014/main" id="{93F014D7-204B-A2DA-07F5-43289898F9CC}"/>
               </a:ext>
             </a:extLst>
           </p:cNvPr>
@@ -4229,7 +4230,7 @@
           <p:cNvPr id="3" name="세로 텍스트 개체 틀 2">
             <a:extLst>
               <a:ext uri="{FF2B5EF4-FFF2-40B4-BE49-F238E27FC236}">
-                <a16:creationId xmlns="" xmlns:a16="http://schemas.microsoft.com/office/drawing/2014/main" id="{70C4AE35-5AB3-14BE-A0B6-D52DAB5A4A07}"/>
+                <a16:creationId xmlns:a16="http://schemas.microsoft.com/office/drawing/2014/main" id="{70C4AE35-5AB3-14BE-A0B6-D52DAB5A4A07}"/>
               </a:ext>
             </a:extLst>
           </p:cNvPr>
@@ -4291,7 +4292,7 @@
           <p:cNvPr id="4" name="날짜 개체 틀 3">
             <a:extLst>
               <a:ext uri="{FF2B5EF4-FFF2-40B4-BE49-F238E27FC236}">
-                <a16:creationId xmlns="" xmlns:a16="http://schemas.microsoft.com/office/drawing/2014/main" id="{7F10D2BD-A4A3-6348-8E67-7FF9641D3FE6}"/>
+                <a16:creationId xmlns:a16="http://schemas.microsoft.com/office/drawing/2014/main" id="{7F10D2BD-A4A3-6348-8E67-7FF9641D3FE6}"/>
               </a:ext>
             </a:extLst>
           </p:cNvPr>
@@ -4316,7 +4317,7 @@
           <p:cNvPr id="5" name="바닥글 개체 틀 4">
             <a:extLst>
               <a:ext uri="{FF2B5EF4-FFF2-40B4-BE49-F238E27FC236}">
-                <a16:creationId xmlns="" xmlns:a16="http://schemas.microsoft.com/office/drawing/2014/main" id="{6DD7E93C-AA65-E1EA-21B6-A6E916BF5DEB}"/>
+                <a16:creationId xmlns:a16="http://schemas.microsoft.com/office/drawing/2014/main" id="{6DD7E93C-AA65-E1EA-21B6-A6E916BF5DEB}"/>
               </a:ext>
             </a:extLst>
           </p:cNvPr>
@@ -4341,7 +4342,7 @@
           <p:cNvPr id="6" name="슬라이드 번호 개체 틀 5">
             <a:extLst>
               <a:ext uri="{FF2B5EF4-FFF2-40B4-BE49-F238E27FC236}">
-                <a16:creationId xmlns="" xmlns:a16="http://schemas.microsoft.com/office/drawing/2014/main" id="{B49E68D9-EC30-E23B-B6E5-7C224CBAEDDE}"/>
+                <a16:creationId xmlns:a16="http://schemas.microsoft.com/office/drawing/2014/main" id="{B49E68D9-EC30-E23B-B6E5-7C224CBAEDDE}"/>
               </a:ext>
             </a:extLst>
           </p:cNvPr>
@@ -4400,7 +4401,7 @@
           <p:cNvPr id="7" name="그룹 6">
             <a:extLst>
               <a:ext uri="{FF2B5EF4-FFF2-40B4-BE49-F238E27FC236}">
-                <a16:creationId xmlns="" xmlns:a16="http://schemas.microsoft.com/office/drawing/2014/main" id="{CAF7E84F-6A29-7724-61B1-0EFD44BEAE91}"/>
+                <a16:creationId xmlns:a16="http://schemas.microsoft.com/office/drawing/2014/main" id="{CAF7E84F-6A29-7724-61B1-0EFD44BEAE91}"/>
               </a:ext>
             </a:extLst>
           </p:cNvPr>
@@ -4420,7 +4421,7 @@
             <p:cNvPr id="8" name="그림 7">
               <a:extLst>
                 <a:ext uri="{FF2B5EF4-FFF2-40B4-BE49-F238E27FC236}">
-                  <a16:creationId xmlns="" xmlns:a16="http://schemas.microsoft.com/office/drawing/2014/main" id="{33D3DCC3-05EC-5A68-BEA1-1AFD7C8F2C0A}"/>
+                  <a16:creationId xmlns:a16="http://schemas.microsoft.com/office/drawing/2014/main" id="{33D3DCC3-05EC-5A68-BEA1-1AFD7C8F2C0A}"/>
                 </a:ext>
               </a:extLst>
             </p:cNvPr>
@@ -4456,7 +4457,7 @@
             <p:cNvPr id="9" name="그래픽 8">
               <a:extLst>
                 <a:ext uri="{FF2B5EF4-FFF2-40B4-BE49-F238E27FC236}">
-                  <a16:creationId xmlns="" xmlns:a16="http://schemas.microsoft.com/office/drawing/2014/main" id="{9D871D4F-2142-7238-5EEF-BFC6E8ACB6A1}"/>
+                  <a16:creationId xmlns:a16="http://schemas.microsoft.com/office/drawing/2014/main" id="{9D871D4F-2142-7238-5EEF-BFC6E8ACB6A1}"/>
                 </a:ext>
               </a:extLst>
             </p:cNvPr>
@@ -4469,7 +4470,7 @@
             <a:blip r:embed="rId3">
               <a:extLst>
                 <a:ext uri="{96DAC541-7B7A-43D3-8B79-37D633B846F1}">
-                  <asvg:svgBlip xmlns="" xmlns:asvg="http://schemas.microsoft.com/office/drawing/2016/SVG/main" r:embed="rId4"/>
+                  <asvg:svgBlip xmlns:asvg="http://schemas.microsoft.com/office/drawing/2016/SVG/main" xmlns="" r:embed="rId4"/>
                 </a:ext>
               </a:extLst>
             </a:blip>
@@ -4492,7 +4493,7 @@
             <p:cNvPr id="10" name="그림 9">
               <a:extLst>
                 <a:ext uri="{FF2B5EF4-FFF2-40B4-BE49-F238E27FC236}">
-                  <a16:creationId xmlns="" xmlns:a16="http://schemas.microsoft.com/office/drawing/2014/main" id="{FA6B7C46-8303-F2AD-3E40-F38C95F096F4}"/>
+                  <a16:creationId xmlns:a16="http://schemas.microsoft.com/office/drawing/2014/main" id="{FA6B7C46-8303-F2AD-3E40-F38C95F096F4}"/>
                 </a:ext>
               </a:extLst>
             </p:cNvPr>
@@ -4574,7 +4575,7 @@
           <p:cNvPr id="23" name="그룹 22">
             <a:extLst>
               <a:ext uri="{FF2B5EF4-FFF2-40B4-BE49-F238E27FC236}">
-                <a16:creationId xmlns="" xmlns:a16="http://schemas.microsoft.com/office/drawing/2014/main" id="{77DF33AB-34B6-5306-502E-0D6DC84A24A3}"/>
+                <a16:creationId xmlns:a16="http://schemas.microsoft.com/office/drawing/2014/main" id="{77DF33AB-34B6-5306-502E-0D6DC84A24A3}"/>
               </a:ext>
             </a:extLst>
           </p:cNvPr>
@@ -4594,7 +4595,7 @@
             <p:cNvPr id="20" name="그림 19">
               <a:extLst>
                 <a:ext uri="{FF2B5EF4-FFF2-40B4-BE49-F238E27FC236}">
-                  <a16:creationId xmlns="" xmlns:a16="http://schemas.microsoft.com/office/drawing/2014/main" id="{3A6BD8A5-B214-8744-F946-A9DACA485089}"/>
+                  <a16:creationId xmlns:a16="http://schemas.microsoft.com/office/drawing/2014/main" id="{3A6BD8A5-B214-8744-F946-A9DACA485089}"/>
                 </a:ext>
               </a:extLst>
             </p:cNvPr>
@@ -4629,7 +4630,7 @@
             <p:cNvPr id="22" name="직선 연결선 21">
               <a:extLst>
                 <a:ext uri="{FF2B5EF4-FFF2-40B4-BE49-F238E27FC236}">
-                  <a16:creationId xmlns="" xmlns:a16="http://schemas.microsoft.com/office/drawing/2014/main" id="{3289BB11-C5A3-9CAA-2E4F-083A66CB7BBB}"/>
+                  <a16:creationId xmlns:a16="http://schemas.microsoft.com/office/drawing/2014/main" id="{3289BB11-C5A3-9CAA-2E4F-083A66CB7BBB}"/>
                 </a:ext>
               </a:extLst>
             </p:cNvPr>
@@ -4671,7 +4672,7 @@
           <p:cNvPr id="24" name="그래픽 23">
             <a:extLst>
               <a:ext uri="{FF2B5EF4-FFF2-40B4-BE49-F238E27FC236}">
-                <a16:creationId xmlns="" xmlns:a16="http://schemas.microsoft.com/office/drawing/2014/main" id="{216F024D-79EB-7A9B-BEBB-D6DE32CCBD2F}"/>
+                <a16:creationId xmlns:a16="http://schemas.microsoft.com/office/drawing/2014/main" id="{216F024D-79EB-7A9B-BEBB-D6DE32CCBD2F}"/>
               </a:ext>
             </a:extLst>
           </p:cNvPr>
@@ -4684,7 +4685,7 @@
           <a:blip r:embed="rId3">
             <a:extLst>
               <a:ext uri="{96DAC541-7B7A-43D3-8B79-37D633B846F1}">
-                <asvg:svgBlip xmlns="" xmlns:asvg="http://schemas.microsoft.com/office/drawing/2016/SVG/main" r:embed="rId4"/>
+                <asvg:svgBlip xmlns:asvg="http://schemas.microsoft.com/office/drawing/2016/SVG/main" xmlns="" r:embed="rId4"/>
               </a:ext>
             </a:extLst>
           </a:blip>
@@ -4707,7 +4708,7 @@
           <p:cNvPr id="3" name="Rectangle 17">
             <a:extLst>
               <a:ext uri="{FF2B5EF4-FFF2-40B4-BE49-F238E27FC236}">
-                <a16:creationId xmlns="" xmlns:a16="http://schemas.microsoft.com/office/drawing/2014/main" id="{0BBBA3DB-D135-E611-1439-C308CFA88980}"/>
+                <a16:creationId xmlns:a16="http://schemas.microsoft.com/office/drawing/2014/main" id="{0BBBA3DB-D135-E611-1439-C308CFA88980}"/>
               </a:ext>
             </a:extLst>
           </p:cNvPr>
@@ -4842,7 +4843,7 @@
           <p:cNvPr id="11" name="그림 10">
             <a:extLst>
               <a:ext uri="{FF2B5EF4-FFF2-40B4-BE49-F238E27FC236}">
-                <a16:creationId xmlns="" xmlns:a16="http://schemas.microsoft.com/office/drawing/2014/main" id="{C19DAA70-AA39-4088-5B03-7ACD8D642425}"/>
+                <a16:creationId xmlns:a16="http://schemas.microsoft.com/office/drawing/2014/main" id="{C19DAA70-AA39-4088-5B03-7ACD8D642425}"/>
               </a:ext>
             </a:extLst>
           </p:cNvPr>
@@ -4878,7 +4879,7 @@
           <p:cNvPr id="12" name="그래픽 11">
             <a:extLst>
               <a:ext uri="{FF2B5EF4-FFF2-40B4-BE49-F238E27FC236}">
-                <a16:creationId xmlns="" xmlns:a16="http://schemas.microsoft.com/office/drawing/2014/main" id="{D45CA531-D67B-AD53-7FD5-FD65E6B395CE}"/>
+                <a16:creationId xmlns:a16="http://schemas.microsoft.com/office/drawing/2014/main" id="{D45CA531-D67B-AD53-7FD5-FD65E6B395CE}"/>
               </a:ext>
             </a:extLst>
           </p:cNvPr>
@@ -4891,7 +4892,7 @@
           <a:blip r:embed="rId3">
             <a:extLst>
               <a:ext uri="{96DAC541-7B7A-43D3-8B79-37D633B846F1}">
-                <asvg:svgBlip xmlns="" xmlns:asvg="http://schemas.microsoft.com/office/drawing/2016/SVG/main" r:embed="rId4"/>
+                <asvg:svgBlip xmlns:asvg="http://schemas.microsoft.com/office/drawing/2016/SVG/main" xmlns="" r:embed="rId4"/>
               </a:ext>
             </a:extLst>
           </a:blip>
@@ -5451,7 +5452,7 @@
           <p:cNvPr id="8" name="그림 7">
             <a:extLst>
               <a:ext uri="{FF2B5EF4-FFF2-40B4-BE49-F238E27FC236}">
-                <a16:creationId xmlns="" xmlns:a16="http://schemas.microsoft.com/office/drawing/2014/main" id="{0D628D54-1874-5083-B4B3-57F06BA0F790}"/>
+                <a16:creationId xmlns:a16="http://schemas.microsoft.com/office/drawing/2014/main" id="{0D628D54-1874-5083-B4B3-57F06BA0F790}"/>
               </a:ext>
             </a:extLst>
           </p:cNvPr>
@@ -5487,7 +5488,7 @@
           <p:cNvPr id="2" name="그래픽 1">
             <a:extLst>
               <a:ext uri="{FF2B5EF4-FFF2-40B4-BE49-F238E27FC236}">
-                <a16:creationId xmlns="" xmlns:a16="http://schemas.microsoft.com/office/drawing/2014/main" id="{57F824F3-9EE7-8A03-99C4-FE098D20B71D}"/>
+                <a16:creationId xmlns:a16="http://schemas.microsoft.com/office/drawing/2014/main" id="{57F824F3-9EE7-8A03-99C4-FE098D20B71D}"/>
               </a:ext>
             </a:extLst>
           </p:cNvPr>
@@ -5500,7 +5501,7 @@
           <a:blip r:embed="rId3">
             <a:extLst>
               <a:ext uri="{96DAC541-7B7A-43D3-8B79-37D633B846F1}">
-                <asvg:svgBlip xmlns="" xmlns:asvg="http://schemas.microsoft.com/office/drawing/2016/SVG/main" r:embed="rId4"/>
+                <asvg:svgBlip xmlns:asvg="http://schemas.microsoft.com/office/drawing/2016/SVG/main" xmlns="" r:embed="rId4"/>
               </a:ext>
             </a:extLst>
           </a:blip>
@@ -6127,7 +6128,7 @@
           <p:cNvPr id="2" name="제목 개체 틀 1">
             <a:extLst>
               <a:ext uri="{FF2B5EF4-FFF2-40B4-BE49-F238E27FC236}">
-                <a16:creationId xmlns="" xmlns:a16="http://schemas.microsoft.com/office/drawing/2014/main" id="{54FAC57F-B446-8C9D-7247-E192B8131E50}"/>
+                <a16:creationId xmlns:a16="http://schemas.microsoft.com/office/drawing/2014/main" id="{54FAC57F-B446-8C9D-7247-E192B8131E50}"/>
               </a:ext>
             </a:extLst>
           </p:cNvPr>
@@ -6165,7 +6166,7 @@
           <p:cNvPr id="3" name="텍스트 개체 틀 2">
             <a:extLst>
               <a:ext uri="{FF2B5EF4-FFF2-40B4-BE49-F238E27FC236}">
-                <a16:creationId xmlns="" xmlns:a16="http://schemas.microsoft.com/office/drawing/2014/main" id="{3E595891-30D2-BACC-2EEC-43BC4BF3FF2A}"/>
+                <a16:creationId xmlns:a16="http://schemas.microsoft.com/office/drawing/2014/main" id="{3E595891-30D2-BACC-2EEC-43BC4BF3FF2A}"/>
               </a:ext>
             </a:extLst>
           </p:cNvPr>
@@ -6232,7 +6233,7 @@
           <p:cNvPr id="4" name="날짜 개체 틀 3">
             <a:extLst>
               <a:ext uri="{FF2B5EF4-FFF2-40B4-BE49-F238E27FC236}">
-                <a16:creationId xmlns="" xmlns:a16="http://schemas.microsoft.com/office/drawing/2014/main" id="{70786969-F7AE-2A45-527D-B20745DFBBF9}"/>
+                <a16:creationId xmlns:a16="http://schemas.microsoft.com/office/drawing/2014/main" id="{70786969-F7AE-2A45-527D-B20745DFBBF9}"/>
               </a:ext>
             </a:extLst>
           </p:cNvPr>
@@ -6275,7 +6276,7 @@
           <p:cNvPr id="5" name="바닥글 개체 틀 4">
             <a:extLst>
               <a:ext uri="{FF2B5EF4-FFF2-40B4-BE49-F238E27FC236}">
-                <a16:creationId xmlns="" xmlns:a16="http://schemas.microsoft.com/office/drawing/2014/main" id="{B8739C20-6B0F-C327-C0CB-0203421C810A}"/>
+                <a16:creationId xmlns:a16="http://schemas.microsoft.com/office/drawing/2014/main" id="{B8739C20-6B0F-C327-C0CB-0203421C810A}"/>
               </a:ext>
             </a:extLst>
           </p:cNvPr>
@@ -6318,7 +6319,7 @@
           <p:cNvPr id="6" name="슬라이드 번호 개체 틀 5">
             <a:extLst>
               <a:ext uri="{FF2B5EF4-FFF2-40B4-BE49-F238E27FC236}">
-                <a16:creationId xmlns="" xmlns:a16="http://schemas.microsoft.com/office/drawing/2014/main" id="{ABF34F80-6458-73AE-A3D9-1F0457DB6543}"/>
+                <a16:creationId xmlns:a16="http://schemas.microsoft.com/office/drawing/2014/main" id="{ABF34F80-6458-73AE-A3D9-1F0457DB6543}"/>
               </a:ext>
             </a:extLst>
           </p:cNvPr>
@@ -7083,6 +7084,29 @@
           <a:chExt cx="0" cy="0"/>
         </a:xfrm>
       </p:grpSpPr>
+      <p:pic>
+        <p:nvPicPr>
+          <p:cNvPr id="3" name="그림 2"/>
+          <p:cNvPicPr>
+            <a:picLocks noChangeAspect="1"/>
+          </p:cNvPicPr>
+          <p:nvPr/>
+        </p:nvPicPr>
+        <p:blipFill rotWithShape="1">
+          <a:blip r:embed="rId2"/>
+          <a:srcRect b="19518"/>
+          <a:stretch/>
+        </p:blipFill>
+        <p:spPr>
+          <a:xfrm>
+            <a:off x="1246050" y="2537255"/>
+            <a:ext cx="9299847" cy="4187391"/>
+          </a:xfrm>
+          <a:prstGeom prst="rect">
+            <a:avLst/>
+          </a:prstGeom>
+        </p:spPr>
+      </p:pic>
       <p:sp>
         <p:nvSpPr>
           <p:cNvPr id="7" name="제목 3"/>
@@ -7244,7 +7268,7 @@
           <p:cNvPr id="11" name="내용 개체 틀 1">
             <a:extLst>
               <a:ext uri="{FF2B5EF4-FFF2-40B4-BE49-F238E27FC236}">
-                <a16:creationId xmlns="" xmlns:a16="http://schemas.microsoft.com/office/drawing/2014/main" id="{2EBDDC94-86D1-4814-9590-0B740A448669}"/>
+                <a16:creationId xmlns:a16="http://schemas.microsoft.com/office/drawing/2014/main" id="{2EBDDC94-86D1-4814-9590-0B740A448669}"/>
               </a:ext>
             </a:extLst>
           </p:cNvPr>
@@ -7308,7 +7332,7 @@
               <a:buSzPct val="110000"/>
               <a:buFontTx/>
               <a:buBlip>
-                <a:blip r:embed="rId2"/>
+                <a:blip r:embed="rId3"/>
               </a:buBlip>
               <a:defRPr spc="-50" baseline="0">
                 <a:gradFill>
@@ -7336,7 +7360,7 @@
               <a:buSzPct val="110000"/>
               <a:buFontTx/>
               <a:buBlip>
-                <a:blip r:embed="rId3"/>
+                <a:blip r:embed="rId4"/>
               </a:buBlip>
               <a:defRPr spc="-50" baseline="0">
                 <a:gradFill>
@@ -7367,7 +7391,7 @@
               <a:buSzPct val="110000"/>
               <a:buFontTx/>
               <a:buBlip>
-                <a:blip r:embed="rId4"/>
+                <a:blip r:embed="rId5"/>
               </a:buBlip>
               <a:defRPr spc="-50" baseline="0">
                 <a:gradFill>
@@ -7398,7 +7422,7 @@
               <a:buSzPct val="110000"/>
               <a:buFontTx/>
               <a:buBlip>
-                <a:blip r:embed="rId5"/>
+                <a:blip r:embed="rId6"/>
               </a:buBlip>
               <a:defRPr spc="-50" baseline="0">
                 <a:gradFill>
@@ -7429,7 +7453,7 @@
               <a:buSzPct val="110000"/>
               <a:buFontTx/>
               <a:buBlip>
-                <a:blip r:embed="rId6"/>
+                <a:blip r:embed="rId7"/>
               </a:buBlip>
               <a:defRPr spc="-50">
                 <a:gradFill>
@@ -7460,7 +7484,7 @@
               <a:buSzPct val="110000"/>
               <a:buFontTx/>
               <a:buBlip>
-                <a:blip r:embed="rId7"/>
+                <a:blip r:embed="rId8"/>
               </a:buBlip>
               <a:defRPr spc="-50">
                 <a:gradFill>
@@ -7491,7 +7515,7 @@
               <a:buSzPct val="110000"/>
               <a:buFontTx/>
               <a:buBlip>
-                <a:blip r:embed="rId8"/>
+                <a:blip r:embed="rId9"/>
               </a:buBlip>
               <a:defRPr spc="-50">
                 <a:gradFill>
@@ -7522,7 +7546,7 @@
               <a:buSzPct val="110000"/>
               <a:buFontTx/>
               <a:buBlip>
-                <a:blip r:embed="rId9"/>
+                <a:blip r:embed="rId10"/>
               </a:buBlip>
               <a:defRPr spc="-50" baseline="0">
                 <a:gradFill>
@@ -7770,29 +7794,6 @@
           </a:p>
         </p:txBody>
       </p:sp>
-      <p:pic>
-        <p:nvPicPr>
-          <p:cNvPr id="2" name="그림 1"/>
-          <p:cNvPicPr>
-            <a:picLocks noChangeAspect="1"/>
-          </p:cNvPicPr>
-          <p:nvPr/>
-        </p:nvPicPr>
-        <p:blipFill rotWithShape="1">
-          <a:blip r:embed="rId10"/>
-          <a:srcRect b="59682"/>
-          <a:stretch/>
-        </p:blipFill>
-        <p:spPr>
-          <a:xfrm>
-            <a:off x="1210333" y="2773553"/>
-            <a:ext cx="9324975" cy="1966246"/>
-          </a:xfrm>
-          <a:prstGeom prst="rect">
-            <a:avLst/>
-          </a:prstGeom>
-        </p:spPr>
-      </p:pic>
       <p:sp>
         <p:nvSpPr>
           <p:cNvPr id="6" name="직사각형 5"/>
@@ -7801,8 +7802,8 @@
         </p:nvSpPr>
         <p:spPr>
           <a:xfrm>
-            <a:off x="4583583" y="3081208"/>
-            <a:ext cx="1312391" cy="166817"/>
+            <a:off x="3806656" y="2905040"/>
+            <a:ext cx="2057249" cy="442167"/>
           </a:xfrm>
           <a:prstGeom prst="rect">
             <a:avLst/>
@@ -7853,6 +7854,793 @@
 </file>
 
 <file path=ppt/slides/slide11.xml><?xml version="1.0" encoding="utf-8"?>
+<p:sld xmlns:a="http://schemas.openxmlformats.org/drawingml/2006/main" xmlns:r="http://schemas.openxmlformats.org/officeDocument/2006/relationships" xmlns:p="http://schemas.openxmlformats.org/presentationml/2006/main">
+  <p:cSld>
+    <p:spTree>
+      <p:nvGrpSpPr>
+        <p:cNvPr id="1" name=""/>
+        <p:cNvGrpSpPr/>
+        <p:nvPr/>
+      </p:nvGrpSpPr>
+      <p:grpSpPr>
+        <a:xfrm>
+          <a:off x="0" y="0"/>
+          <a:ext cx="0" cy="0"/>
+          <a:chOff x="0" y="0"/>
+          <a:chExt cx="0" cy="0"/>
+        </a:xfrm>
+      </p:grpSpPr>
+      <p:pic>
+        <p:nvPicPr>
+          <p:cNvPr id="2" name="그림 1"/>
+          <p:cNvPicPr>
+            <a:picLocks noChangeAspect="1"/>
+          </p:cNvPicPr>
+          <p:nvPr/>
+        </p:nvPicPr>
+        <p:blipFill>
+          <a:blip r:embed="rId2"/>
+          <a:stretch>
+            <a:fillRect/>
+          </a:stretch>
+        </p:blipFill>
+        <p:spPr>
+          <a:xfrm>
+            <a:off x="316212" y="2471353"/>
+            <a:ext cx="10536120" cy="3953427"/>
+          </a:xfrm>
+          <a:prstGeom prst="rect">
+            <a:avLst/>
+          </a:prstGeom>
+        </p:spPr>
+      </p:pic>
+      <p:sp>
+        <p:nvSpPr>
+          <p:cNvPr id="7" name="제목 3"/>
+          <p:cNvSpPr txBox="1">
+            <a:spLocks/>
+          </p:cNvSpPr>
+          <p:nvPr/>
+        </p:nvSpPr>
+        <p:spPr>
+          <a:xfrm>
+            <a:off x="228322" y="247670"/>
+            <a:ext cx="8147050" cy="553998"/>
+          </a:xfrm>
+          <a:prstGeom prst="rect">
+            <a:avLst/>
+          </a:prstGeom>
+        </p:spPr>
+        <p:txBody>
+          <a:bodyPr vert="horz" lIns="91440" tIns="45720" rIns="91440" bIns="45720" rtlCol="0" anchor="b">
+            <a:noAutofit/>
+          </a:bodyPr>
+          <a:lstStyle>
+            <a:lvl1pPr algn="ctr" defTabSz="914400" rtl="0" eaLnBrk="1" latinLnBrk="1" hangingPunct="1">
+              <a:lnSpc>
+                <a:spcPct val="90000"/>
+              </a:lnSpc>
+              <a:spcBef>
+                <a:spcPct val="0"/>
+              </a:spcBef>
+              <a:buNone/>
+              <a:defRPr sz="6000" kern="1200">
+                <a:solidFill>
+                  <a:schemeClr val="tx1"/>
+                </a:solidFill>
+                <a:latin typeface="+mj-lt"/>
+                <a:ea typeface="+mj-ea"/>
+                <a:cs typeface="+mj-cs"/>
+              </a:defRPr>
+            </a:lvl1pPr>
+          </a:lstStyle>
+          <a:p>
+            <a:pPr algn="l">
+              <a:lnSpc>
+                <a:spcPct val="114000"/>
+              </a:lnSpc>
+            </a:pPr>
+            <a:r>
+              <a:rPr lang="en-US" altLang="ko-KR" sz="3600" b="1" spc="-150" dirty="0" smtClean="0">
+                <a:ln>
+                  <a:solidFill>
+                    <a:srgbClr val="4F81BD">
+                      <a:alpha val="0"/>
+                    </a:srgbClr>
+                  </a:solidFill>
+                </a:ln>
+                <a:solidFill>
+                  <a:schemeClr val="bg1"/>
+                </a:solidFill>
+                <a:latin typeface="맑은 고딕" panose="020B0503020000020004" pitchFamily="50" charset="-127"/>
+                <a:ea typeface="맑은 고딕" panose="020B0503020000020004" pitchFamily="50" charset="-127"/>
+                <a:cs typeface="Segoe UI" panose="020B0502040204020203" pitchFamily="34" charset="0"/>
+              </a:rPr>
+              <a:t>Docker </a:t>
+            </a:r>
+            <a:r>
+              <a:rPr lang="ko-KR" altLang="en-US" sz="3600" b="1" spc="-150" dirty="0" smtClean="0">
+                <a:ln>
+                  <a:solidFill>
+                    <a:srgbClr val="4F81BD">
+                      <a:alpha val="0"/>
+                    </a:srgbClr>
+                  </a:solidFill>
+                </a:ln>
+                <a:solidFill>
+                  <a:schemeClr val="bg1"/>
+                </a:solidFill>
+                <a:latin typeface="맑은 고딕" panose="020B0503020000020004" pitchFamily="50" charset="-127"/>
+                <a:ea typeface="맑은 고딕" panose="020B0503020000020004" pitchFamily="50" charset="-127"/>
+                <a:cs typeface="Segoe UI" panose="020B0502040204020203" pitchFamily="34" charset="0"/>
+              </a:rPr>
+              <a:t>설치</a:t>
+            </a:r>
+            <a:endParaRPr lang="ko-KR" altLang="en-US" sz="3600" b="1" spc="-150" dirty="0">
+              <a:ln>
+                <a:solidFill>
+                  <a:srgbClr val="4F81BD">
+                    <a:alpha val="0"/>
+                  </a:srgbClr>
+                </a:solidFill>
+              </a:ln>
+              <a:solidFill>
+                <a:schemeClr val="bg1"/>
+              </a:solidFill>
+              <a:latin typeface="맑은 고딕" panose="020B0503020000020004" pitchFamily="50" charset="-127"/>
+              <a:ea typeface="맑은 고딕" panose="020B0503020000020004" pitchFamily="50" charset="-127"/>
+              <a:cs typeface="Segoe UI" panose="020B0502040204020203" pitchFamily="34" charset="0"/>
+            </a:endParaRPr>
+          </a:p>
+        </p:txBody>
+      </p:sp>
+      <p:sp>
+        <p:nvSpPr>
+          <p:cNvPr id="9" name="직사각형 8"/>
+          <p:cNvSpPr/>
+          <p:nvPr/>
+        </p:nvSpPr>
+        <p:spPr>
+          <a:xfrm>
+            <a:off x="0" y="1153297"/>
+            <a:ext cx="12192000" cy="1268627"/>
+          </a:xfrm>
+          <a:prstGeom prst="rect">
+            <a:avLst/>
+          </a:prstGeom>
+          <a:pattFill prst="dkUpDiag">
+            <a:fgClr>
+              <a:schemeClr val="bg2">
+                <a:lumMod val="90000"/>
+              </a:schemeClr>
+            </a:fgClr>
+            <a:bgClr>
+              <a:schemeClr val="bg2"/>
+            </a:bgClr>
+          </a:pattFill>
+          <a:ln>
+            <a:noFill/>
+          </a:ln>
+        </p:spPr>
+        <p:style>
+          <a:lnRef idx="2">
+            <a:schemeClr val="accent1">
+              <a:shade val="50000"/>
+            </a:schemeClr>
+          </a:lnRef>
+          <a:fillRef idx="1">
+            <a:schemeClr val="accent1"/>
+          </a:fillRef>
+          <a:effectRef idx="0">
+            <a:schemeClr val="accent1"/>
+          </a:effectRef>
+          <a:fontRef idx="minor">
+            <a:schemeClr val="lt1"/>
+          </a:fontRef>
+        </p:style>
+        <p:txBody>
+          <a:bodyPr rtlCol="0" anchor="ctr"/>
+          <a:lstStyle/>
+          <a:p>
+            <a:pPr algn="ctr"/>
+            <a:endParaRPr lang="ko-KR" altLang="en-US">
+              <a:latin typeface="맑은 고딕" panose="020B0503020000020004" pitchFamily="50" charset="-127"/>
+              <a:ea typeface="맑은 고딕" panose="020B0503020000020004" pitchFamily="50" charset="-127"/>
+            </a:endParaRPr>
+          </a:p>
+        </p:txBody>
+      </p:sp>
+      <p:sp>
+        <p:nvSpPr>
+          <p:cNvPr id="11" name="내용 개체 틀 1">
+            <a:extLst>
+              <a:ext uri="{FF2B5EF4-FFF2-40B4-BE49-F238E27FC236}">
+                <a16:creationId xmlns:a16="http://schemas.microsoft.com/office/drawing/2014/main" id="{2EBDDC94-86D1-4814-9590-0B740A448669}"/>
+              </a:ext>
+            </a:extLst>
+          </p:cNvPr>
+          <p:cNvSpPr txBox="1">
+            <a:spLocks/>
+          </p:cNvSpPr>
+          <p:nvPr/>
+        </p:nvSpPr>
+        <p:spPr>
+          <a:xfrm>
+            <a:off x="228322" y="1268628"/>
+            <a:ext cx="8469061" cy="1087394"/>
+          </a:xfrm>
+          <a:prstGeom prst="rect">
+            <a:avLst/>
+          </a:prstGeom>
+        </p:spPr>
+        <p:txBody>
+          <a:bodyPr vert="horz" lIns="0" tIns="0" rIns="0" bIns="0" rtlCol="0" anchor="ctr">
+            <a:noAutofit/>
+          </a:bodyPr>
+          <a:lstStyle>
+            <a:defPPr>
+              <a:defRPr lang="ko-KR"/>
+            </a:defPPr>
+            <a:lvl1pPr lvl="0" indent="0">
+              <a:lnSpc>
+                <a:spcPct val="110000"/>
+              </a:lnSpc>
+              <a:spcBef>
+                <a:spcPts val="600"/>
+              </a:spcBef>
+              <a:buFont typeface="Arial" panose="020B0604020202020204" pitchFamily="34" charset="0"/>
+              <a:buNone/>
+              <a:defRPr spc="-50" baseline="0">
+                <a:gradFill>
+                  <a:gsLst>
+                    <a:gs pos="0">
+                      <a:srgbClr val="000000"/>
+                    </a:gs>
+                    <a:gs pos="100000">
+                      <a:srgbClr val="000000"/>
+                    </a:gs>
+                  </a:gsLst>
+                  <a:lin ang="5400000" scaled="1"/>
+                </a:gradFill>
+                <a:latin typeface="나눔스퀘어" panose="020B0600000101010101" pitchFamily="50" charset="-127"/>
+                <a:ea typeface="나눔스퀘어" panose="020B0600000101010101" pitchFamily="50" charset="-127"/>
+              </a:defRPr>
+            </a:lvl1pPr>
+            <a:lvl2pPr marL="252000" lvl="1" indent="-252000">
+              <a:lnSpc>
+                <a:spcPct val="110000"/>
+              </a:lnSpc>
+              <a:spcBef>
+                <a:spcPts val="600"/>
+              </a:spcBef>
+              <a:buClr>
+                <a:srgbClr val="8892AA"/>
+              </a:buClr>
+              <a:buSzPct val="110000"/>
+              <a:buFontTx/>
+              <a:buBlip>
+                <a:blip r:embed="rId3"/>
+              </a:buBlip>
+              <a:defRPr spc="-50" baseline="0">
+                <a:gradFill>
+                  <a:gsLst>
+                    <a:gs pos="0">
+                      <a:srgbClr val="000000"/>
+                    </a:gs>
+                    <a:gs pos="100000">
+                      <a:srgbClr val="000000"/>
+                    </a:gs>
+                  </a:gsLst>
+                  <a:lin ang="5400000" scaled="1"/>
+                </a:gradFill>
+                <a:latin typeface="나눔스퀘어" panose="020B0600000101010101" pitchFamily="50" charset="-127"/>
+                <a:ea typeface="나눔스퀘어" panose="020B0600000101010101" pitchFamily="50" charset="-127"/>
+              </a:defRPr>
+            </a:lvl2pPr>
+            <a:lvl3pPr marL="252000" lvl="2" indent="-252000">
+              <a:lnSpc>
+                <a:spcPct val="110000"/>
+              </a:lnSpc>
+              <a:spcBef>
+                <a:spcPts val="600"/>
+              </a:spcBef>
+              <a:buSzPct val="110000"/>
+              <a:buFontTx/>
+              <a:buBlip>
+                <a:blip r:embed="rId4"/>
+              </a:buBlip>
+              <a:defRPr spc="-50" baseline="0">
+                <a:gradFill>
+                  <a:gsLst>
+                    <a:gs pos="0">
+                      <a:srgbClr val="000000"/>
+                    </a:gs>
+                    <a:gs pos="100000">
+                      <a:srgbClr val="000000"/>
+                    </a:gs>
+                  </a:gsLst>
+                  <a:lin ang="5400000" scaled="1"/>
+                </a:gradFill>
+                <a:latin typeface="나눔스퀘어" panose="020B0600000101010101" pitchFamily="50" charset="-127"/>
+                <a:ea typeface="나눔스퀘어" panose="020B0600000101010101" pitchFamily="50" charset="-127"/>
+              </a:defRPr>
+            </a:lvl3pPr>
+            <a:lvl4pPr marL="252000" lvl="3" indent="-252000">
+              <a:lnSpc>
+                <a:spcPct val="110000"/>
+              </a:lnSpc>
+              <a:spcBef>
+                <a:spcPts val="600"/>
+              </a:spcBef>
+              <a:buClr>
+                <a:srgbClr val="8892AA"/>
+              </a:buClr>
+              <a:buSzPct val="110000"/>
+              <a:buFontTx/>
+              <a:buBlip>
+                <a:blip r:embed="rId5"/>
+              </a:buBlip>
+              <a:defRPr spc="-50" baseline="0">
+                <a:gradFill>
+                  <a:gsLst>
+                    <a:gs pos="0">
+                      <a:srgbClr val="000000"/>
+                    </a:gs>
+                    <a:gs pos="100000">
+                      <a:srgbClr val="000000"/>
+                    </a:gs>
+                  </a:gsLst>
+                  <a:lin ang="5400000" scaled="1"/>
+                </a:gradFill>
+                <a:latin typeface="나눔스퀘어" panose="020B0600000101010101" pitchFamily="50" charset="-127"/>
+                <a:ea typeface="나눔스퀘어" panose="020B0600000101010101" pitchFamily="50" charset="-127"/>
+              </a:defRPr>
+            </a:lvl4pPr>
+            <a:lvl5pPr marL="252000" lvl="4" indent="-252000">
+              <a:lnSpc>
+                <a:spcPct val="110000"/>
+              </a:lnSpc>
+              <a:spcBef>
+                <a:spcPts val="600"/>
+              </a:spcBef>
+              <a:buClr>
+                <a:srgbClr val="8892AA"/>
+              </a:buClr>
+              <a:buSzPct val="110000"/>
+              <a:buFontTx/>
+              <a:buBlip>
+                <a:blip r:embed="rId6"/>
+              </a:buBlip>
+              <a:defRPr spc="-50" baseline="0">
+                <a:gradFill>
+                  <a:gsLst>
+                    <a:gs pos="0">
+                      <a:srgbClr val="000000"/>
+                    </a:gs>
+                    <a:gs pos="100000">
+                      <a:srgbClr val="000000"/>
+                    </a:gs>
+                  </a:gsLst>
+                  <a:lin ang="5400000" scaled="1"/>
+                </a:gradFill>
+                <a:latin typeface="나눔스퀘어" panose="020B0600000101010101" pitchFamily="50" charset="-127"/>
+                <a:ea typeface="나눔스퀘어" panose="020B0600000101010101" pitchFamily="50" charset="-127"/>
+              </a:defRPr>
+            </a:lvl5pPr>
+            <a:lvl6pPr marL="252000" lvl="5" indent="-252000">
+              <a:lnSpc>
+                <a:spcPct val="110000"/>
+              </a:lnSpc>
+              <a:spcBef>
+                <a:spcPts val="600"/>
+              </a:spcBef>
+              <a:buClr>
+                <a:srgbClr val="8892AA"/>
+              </a:buClr>
+              <a:buSzPct val="110000"/>
+              <a:buFontTx/>
+              <a:buBlip>
+                <a:blip r:embed="rId7"/>
+              </a:buBlip>
+              <a:defRPr spc="-50">
+                <a:gradFill>
+                  <a:gsLst>
+                    <a:gs pos="0">
+                      <a:srgbClr val="000000"/>
+                    </a:gs>
+                    <a:gs pos="100000">
+                      <a:srgbClr val="000000"/>
+                    </a:gs>
+                  </a:gsLst>
+                  <a:lin ang="5400000" scaled="1"/>
+                </a:gradFill>
+                <a:latin typeface="나눔스퀘어" panose="020B0600000101010101" pitchFamily="50" charset="-127"/>
+                <a:ea typeface="나눔스퀘어" panose="020B0600000101010101" pitchFamily="50" charset="-127"/>
+              </a:defRPr>
+            </a:lvl6pPr>
+            <a:lvl7pPr marL="252000" lvl="6" indent="-252000">
+              <a:lnSpc>
+                <a:spcPct val="110000"/>
+              </a:lnSpc>
+              <a:spcBef>
+                <a:spcPts val="600"/>
+              </a:spcBef>
+              <a:buClr>
+                <a:srgbClr val="8892AA"/>
+              </a:buClr>
+              <a:buSzPct val="110000"/>
+              <a:buFontTx/>
+              <a:buBlip>
+                <a:blip r:embed="rId8"/>
+              </a:buBlip>
+              <a:defRPr spc="-50">
+                <a:gradFill>
+                  <a:gsLst>
+                    <a:gs pos="0">
+                      <a:srgbClr val="000000"/>
+                    </a:gs>
+                    <a:gs pos="100000">
+                      <a:srgbClr val="000000"/>
+                    </a:gs>
+                  </a:gsLst>
+                  <a:lin ang="5400000" scaled="1"/>
+                </a:gradFill>
+                <a:latin typeface="나눔스퀘어" panose="020B0600000101010101" pitchFamily="50" charset="-127"/>
+                <a:ea typeface="나눔스퀘어" panose="020B0600000101010101" pitchFamily="50" charset="-127"/>
+              </a:defRPr>
+            </a:lvl7pPr>
+            <a:lvl8pPr marL="252000" lvl="7" indent="-252000">
+              <a:lnSpc>
+                <a:spcPct val="110000"/>
+              </a:lnSpc>
+              <a:spcBef>
+                <a:spcPts val="600"/>
+              </a:spcBef>
+              <a:buClr>
+                <a:srgbClr val="8892AA"/>
+              </a:buClr>
+              <a:buSzPct val="110000"/>
+              <a:buFontTx/>
+              <a:buBlip>
+                <a:blip r:embed="rId9"/>
+              </a:buBlip>
+              <a:defRPr spc="-50">
+                <a:gradFill>
+                  <a:gsLst>
+                    <a:gs pos="0">
+                      <a:srgbClr val="000000"/>
+                    </a:gs>
+                    <a:gs pos="100000">
+                      <a:srgbClr val="000000"/>
+                    </a:gs>
+                  </a:gsLst>
+                  <a:lin ang="5400000" scaled="1"/>
+                </a:gradFill>
+                <a:latin typeface="나눔스퀘어" panose="020B0600000101010101" pitchFamily="50" charset="-127"/>
+                <a:ea typeface="나눔스퀘어" panose="020B0600000101010101" pitchFamily="50" charset="-127"/>
+              </a:defRPr>
+            </a:lvl8pPr>
+            <a:lvl9pPr marL="252000" lvl="8" indent="-252000">
+              <a:lnSpc>
+                <a:spcPct val="110000"/>
+              </a:lnSpc>
+              <a:spcBef>
+                <a:spcPts val="600"/>
+              </a:spcBef>
+              <a:buClr>
+                <a:srgbClr val="8892AA"/>
+              </a:buClr>
+              <a:buSzPct val="110000"/>
+              <a:buFontTx/>
+              <a:buBlip>
+                <a:blip r:embed="rId10"/>
+              </a:buBlip>
+              <a:defRPr spc="-50" baseline="0">
+                <a:gradFill>
+                  <a:gsLst>
+                    <a:gs pos="0">
+                      <a:srgbClr val="000000"/>
+                    </a:gs>
+                    <a:gs pos="100000">
+                      <a:srgbClr val="000000"/>
+                    </a:gs>
+                  </a:gsLst>
+                  <a:lin ang="5400000" scaled="1"/>
+                </a:gradFill>
+                <a:latin typeface="나눔스퀘어" panose="020B0600000101010101" pitchFamily="50" charset="-127"/>
+                <a:ea typeface="나눔스퀘어" panose="020B0600000101010101" pitchFamily="50" charset="-127"/>
+              </a:defRPr>
+            </a:lvl9pPr>
+          </a:lstStyle>
+          <a:p>
+            <a:pPr>
+              <a:buSzPct val="120000"/>
+            </a:pPr>
+            <a:r>
+              <a:rPr lang="ko-KR" altLang="en-US" sz="2200" b="1" spc="-150" dirty="0">
+                <a:ln>
+                  <a:solidFill>
+                    <a:prstClr val="white">
+                      <a:alpha val="0"/>
+                    </a:prstClr>
+                  </a:solidFill>
+                </a:ln>
+                <a:solidFill>
+                  <a:schemeClr val="tx1">
+                    <a:lumMod val="75000"/>
+                    <a:lumOff val="25000"/>
+                  </a:schemeClr>
+                </a:solidFill>
+                <a:latin typeface="맑은 고딕" panose="020B0503020000020004" pitchFamily="50" charset="-127"/>
+                <a:ea typeface="맑은 고딕" panose="020B0503020000020004" pitchFamily="50" charset="-127"/>
+              </a:rPr>
+              <a:t>실습 환경은 </a:t>
+            </a:r>
+            <a:r>
+              <a:rPr lang="en-US" altLang="ko-KR" sz="2200" b="1" spc="-150" dirty="0">
+                <a:ln>
+                  <a:solidFill>
+                    <a:prstClr val="white">
+                      <a:alpha val="0"/>
+                    </a:prstClr>
+                  </a:solidFill>
+                </a:ln>
+                <a:solidFill>
+                  <a:schemeClr val="tx1">
+                    <a:lumMod val="75000"/>
+                    <a:lumOff val="25000"/>
+                  </a:schemeClr>
+                </a:solidFill>
+                <a:latin typeface="맑은 고딕" panose="020B0503020000020004" pitchFamily="50" charset="-127"/>
+                <a:ea typeface="맑은 고딕" panose="020B0503020000020004" pitchFamily="50" charset="-127"/>
+              </a:rPr>
+              <a:t>Docker</a:t>
+            </a:r>
+            <a:r>
+              <a:rPr lang="ko-KR" altLang="en-US" sz="2200" b="1" spc="-150" dirty="0">
+                <a:ln>
+                  <a:solidFill>
+                    <a:prstClr val="white">
+                      <a:alpha val="0"/>
+                    </a:prstClr>
+                  </a:solidFill>
+                </a:ln>
+                <a:solidFill>
+                  <a:schemeClr val="tx1">
+                    <a:lumMod val="75000"/>
+                    <a:lumOff val="25000"/>
+                  </a:schemeClr>
+                </a:solidFill>
+                <a:latin typeface="맑은 고딕" panose="020B0503020000020004" pitchFamily="50" charset="-127"/>
+                <a:ea typeface="맑은 고딕" panose="020B0503020000020004" pitchFamily="50" charset="-127"/>
+              </a:rPr>
+              <a:t>를 기반으로 구축되어 있습니다</a:t>
+            </a:r>
+            <a:r>
+              <a:rPr lang="en-US" altLang="ko-KR" sz="2200" b="1" spc="-150" dirty="0">
+                <a:ln>
+                  <a:solidFill>
+                    <a:prstClr val="white">
+                      <a:alpha val="0"/>
+                    </a:prstClr>
+                  </a:solidFill>
+                </a:ln>
+                <a:solidFill>
+                  <a:schemeClr val="tx1">
+                    <a:lumMod val="75000"/>
+                    <a:lumOff val="25000"/>
+                  </a:schemeClr>
+                </a:solidFill>
+                <a:latin typeface="맑은 고딕" panose="020B0503020000020004" pitchFamily="50" charset="-127"/>
+                <a:ea typeface="맑은 고딕" panose="020B0503020000020004" pitchFamily="50" charset="-127"/>
+              </a:rPr>
+              <a:t>. </a:t>
+            </a:r>
+          </a:p>
+          <a:p>
+            <a:pPr>
+              <a:buSzPct val="120000"/>
+            </a:pPr>
+            <a:r>
+              <a:rPr lang="en-US" altLang="ko-KR" sz="2200" b="1" spc="-150" dirty="0" err="1" smtClean="0">
+                <a:ln>
+                  <a:solidFill>
+                    <a:prstClr val="white">
+                      <a:alpha val="0"/>
+                    </a:prstClr>
+                  </a:solidFill>
+                </a:ln>
+                <a:solidFill>
+                  <a:schemeClr val="tx1">
+                    <a:lumMod val="75000"/>
+                    <a:lumOff val="25000"/>
+                  </a:schemeClr>
+                </a:solidFill>
+                <a:latin typeface="맑은 고딕" panose="020B0503020000020004" pitchFamily="50" charset="-127"/>
+                <a:ea typeface="맑은 고딕" panose="020B0503020000020004" pitchFamily="50" charset="-127"/>
+              </a:rPr>
+              <a:t>wsl</a:t>
+            </a:r>
+            <a:r>
+              <a:rPr lang="en-US" altLang="ko-KR" sz="2200" b="1" spc="-150" dirty="0" smtClean="0">
+                <a:ln>
+                  <a:solidFill>
+                    <a:prstClr val="white">
+                      <a:alpha val="0"/>
+                    </a:prstClr>
+                  </a:solidFill>
+                </a:ln>
+                <a:solidFill>
+                  <a:schemeClr val="tx1">
+                    <a:lumMod val="75000"/>
+                    <a:lumOff val="25000"/>
+                  </a:schemeClr>
+                </a:solidFill>
+                <a:latin typeface="맑은 고딕" panose="020B0503020000020004" pitchFamily="50" charset="-127"/>
+                <a:ea typeface="맑은 고딕" panose="020B0503020000020004" pitchFamily="50" charset="-127"/>
+              </a:rPr>
+              <a:t> </a:t>
+            </a:r>
+            <a:r>
+              <a:rPr lang="ko-KR" altLang="en-US" sz="2200" b="1" spc="-150" dirty="0" smtClean="0">
+                <a:ln>
+                  <a:solidFill>
+                    <a:prstClr val="white">
+                      <a:alpha val="0"/>
+                    </a:prstClr>
+                  </a:solidFill>
+                </a:ln>
+                <a:solidFill>
+                  <a:schemeClr val="tx1">
+                    <a:lumMod val="75000"/>
+                    <a:lumOff val="25000"/>
+                  </a:schemeClr>
+                </a:solidFill>
+                <a:latin typeface="맑은 고딕" panose="020B0503020000020004" pitchFamily="50" charset="-127"/>
+                <a:ea typeface="맑은 고딕" panose="020B0503020000020004" pitchFamily="50" charset="-127"/>
+              </a:rPr>
+              <a:t>환경에서 </a:t>
+            </a:r>
+            <a:r>
+              <a:rPr lang="en-US" altLang="ko-KR" sz="2200" b="1" spc="-150" dirty="0" smtClean="0">
+                <a:ln>
+                  <a:solidFill>
+                    <a:prstClr val="white">
+                      <a:alpha val="0"/>
+                    </a:prstClr>
+                  </a:solidFill>
+                </a:ln>
+                <a:solidFill>
+                  <a:schemeClr val="tx1">
+                    <a:lumMod val="75000"/>
+                    <a:lumOff val="25000"/>
+                  </a:schemeClr>
+                </a:solidFill>
+                <a:latin typeface="맑은 고딕" panose="020B0503020000020004" pitchFamily="50" charset="-127"/>
+                <a:ea typeface="맑은 고딕" panose="020B0503020000020004" pitchFamily="50" charset="-127"/>
+              </a:rPr>
+              <a:t>Docker</a:t>
+            </a:r>
+            <a:r>
+              <a:rPr lang="ko-KR" altLang="en-US" sz="2200" b="1" spc="-150" dirty="0" smtClean="0">
+                <a:ln>
+                  <a:solidFill>
+                    <a:prstClr val="white">
+                      <a:alpha val="0"/>
+                    </a:prstClr>
+                  </a:solidFill>
+                </a:ln>
+                <a:solidFill>
+                  <a:schemeClr val="tx1">
+                    <a:lumMod val="75000"/>
+                    <a:lumOff val="25000"/>
+                  </a:schemeClr>
+                </a:solidFill>
+                <a:latin typeface="맑은 고딕" panose="020B0503020000020004" pitchFamily="50" charset="-127"/>
+                <a:ea typeface="맑은 고딕" panose="020B0503020000020004" pitchFamily="50" charset="-127"/>
+              </a:rPr>
+              <a:t>를 설치합니다</a:t>
+            </a:r>
+            <a:r>
+              <a:rPr lang="en-US" altLang="ko-KR" sz="2200" b="1" spc="-150" dirty="0" smtClean="0">
+                <a:ln>
+                  <a:solidFill>
+                    <a:prstClr val="white">
+                      <a:alpha val="0"/>
+                    </a:prstClr>
+                  </a:solidFill>
+                </a:ln>
+                <a:solidFill>
+                  <a:schemeClr val="tx1">
+                    <a:lumMod val="75000"/>
+                    <a:lumOff val="25000"/>
+                  </a:schemeClr>
+                </a:solidFill>
+                <a:latin typeface="맑은 고딕" panose="020B0503020000020004" pitchFamily="50" charset="-127"/>
+                <a:ea typeface="맑은 고딕" panose="020B0503020000020004" pitchFamily="50" charset="-127"/>
+              </a:rPr>
+              <a:t>.</a:t>
+            </a:r>
+            <a:endParaRPr lang="en-US" altLang="ko-KR" sz="2200" b="1" spc="-150" dirty="0">
+              <a:ln>
+                <a:solidFill>
+                  <a:prstClr val="white">
+                    <a:alpha val="0"/>
+                  </a:prstClr>
+                </a:solidFill>
+              </a:ln>
+              <a:solidFill>
+                <a:schemeClr val="tx1">
+                  <a:lumMod val="75000"/>
+                  <a:lumOff val="25000"/>
+                </a:schemeClr>
+              </a:solidFill>
+              <a:latin typeface="맑은 고딕" panose="020B0503020000020004" pitchFamily="50" charset="-127"/>
+              <a:ea typeface="맑은 고딕" panose="020B0503020000020004" pitchFamily="50" charset="-127"/>
+            </a:endParaRPr>
+          </a:p>
+        </p:txBody>
+      </p:sp>
+      <p:sp>
+        <p:nvSpPr>
+          <p:cNvPr id="6" name="직사각형 5"/>
+          <p:cNvSpPr/>
+          <p:nvPr/>
+        </p:nvSpPr>
+        <p:spPr>
+          <a:xfrm>
+            <a:off x="3434227" y="2871484"/>
+            <a:ext cx="3310522" cy="391833"/>
+          </a:xfrm>
+          <a:prstGeom prst="rect">
+            <a:avLst/>
+          </a:prstGeom>
+          <a:noFill/>
+          <a:ln w="38100">
+            <a:solidFill>
+              <a:schemeClr val="accent2"/>
+            </a:solidFill>
+          </a:ln>
+        </p:spPr>
+        <p:style>
+          <a:lnRef idx="2">
+            <a:schemeClr val="accent1">
+              <a:shade val="50000"/>
+            </a:schemeClr>
+          </a:lnRef>
+          <a:fillRef idx="1">
+            <a:schemeClr val="accent1"/>
+          </a:fillRef>
+          <a:effectRef idx="0">
+            <a:schemeClr val="accent1"/>
+          </a:effectRef>
+          <a:fontRef idx="minor">
+            <a:schemeClr val="lt1"/>
+          </a:fontRef>
+        </p:style>
+        <p:txBody>
+          <a:bodyPr rtlCol="0" anchor="ctr"/>
+          <a:lstStyle/>
+          <a:p>
+            <a:pPr algn="ctr"/>
+            <a:endParaRPr lang="ko-KR" altLang="en-US"/>
+          </a:p>
+        </p:txBody>
+      </p:sp>
+    </p:spTree>
+    <p:extLst>
+      <p:ext uri="{BB962C8B-B14F-4D97-AF65-F5344CB8AC3E}">
+        <p14:creationId xmlns:p14="http://schemas.microsoft.com/office/powerpoint/2010/main" val="602465794"/>
+      </p:ext>
+    </p:extLst>
+  </p:cSld>
+  <p:clrMapOvr>
+    <a:masterClrMapping/>
+  </p:clrMapOvr>
+</p:sld>
+</file>
+
+<file path=ppt/slides/slide12.xml><?xml version="1.0" encoding="utf-8"?>
 <p:sld xmlns:a="http://schemas.openxmlformats.org/drawingml/2006/main" xmlns:r="http://schemas.openxmlformats.org/officeDocument/2006/relationships" xmlns:p="http://schemas.openxmlformats.org/presentationml/2006/main">
   <p:cSld>
     <p:spTree>
@@ -8144,7 +8932,7 @@
 </p:sld>
 </file>
 
-<file path=ppt/slides/slide12.xml><?xml version="1.0" encoding="utf-8"?>
+<file path=ppt/slides/slide13.xml><?xml version="1.0" encoding="utf-8"?>
 <p:sld xmlns:a="http://schemas.openxmlformats.org/drawingml/2006/main" xmlns:r="http://schemas.openxmlformats.org/officeDocument/2006/relationships" xmlns:p="http://schemas.openxmlformats.org/presentationml/2006/main">
   <p:cSld>
     <p:spTree>
@@ -8528,7 +9316,7 @@
 </p:sld>
 </file>
 
-<file path=ppt/slides/slide13.xml><?xml version="1.0" encoding="utf-8"?>
+<file path=ppt/slides/slide14.xml><?xml version="1.0" encoding="utf-8"?>
 <p:sld xmlns:a="http://schemas.openxmlformats.org/drawingml/2006/main" xmlns:r="http://schemas.openxmlformats.org/officeDocument/2006/relationships" xmlns:p="http://schemas.openxmlformats.org/presentationml/2006/main">
   <p:cSld>
     <p:spTree>
@@ -8746,7 +9534,7 @@
 </p:sld>
 </file>
 
-<file path=ppt/slides/slide14.xml><?xml version="1.0" encoding="utf-8"?>
+<file path=ppt/slides/slide15.xml><?xml version="1.0" encoding="utf-8"?>
 <p:sld xmlns:a="http://schemas.openxmlformats.org/drawingml/2006/main" xmlns:r="http://schemas.openxmlformats.org/officeDocument/2006/relationships" xmlns:p="http://schemas.openxmlformats.org/presentationml/2006/main">
   <p:cSld>
     <p:spTree>
@@ -9013,7 +9801,7 @@
 </p:sld>
 </file>
 
-<file path=ppt/slides/slide15.xml><?xml version="1.0" encoding="utf-8"?>
+<file path=ppt/slides/slide16.xml><?xml version="1.0" encoding="utf-8"?>
 <p:sld xmlns:a="http://schemas.openxmlformats.org/drawingml/2006/main" xmlns:r="http://schemas.openxmlformats.org/officeDocument/2006/relationships" xmlns:p="http://schemas.openxmlformats.org/presentationml/2006/main">
   <p:cSld>
     <p:spTree>
@@ -9035,7 +9823,7 @@
           <p:cNvPr id="66" name="그룹 65">
             <a:extLst>
               <a:ext uri="{FF2B5EF4-FFF2-40B4-BE49-F238E27FC236}">
-                <a16:creationId xmlns:a16="http://schemas.microsoft.com/office/drawing/2014/main" xmlns="" id="{906DA828-ECE9-2B5C-421D-CFC40B193035}"/>
+                <a16:creationId xmlns:a16="http://schemas.microsoft.com/office/drawing/2014/main" id="{906DA828-ECE9-2B5C-421D-CFC40B193035}"/>
               </a:ext>
             </a:extLst>
           </p:cNvPr>
@@ -9112,7 +9900,7 @@
             <p:cNvPr id="59" name="그룹 58">
               <a:extLst>
                 <a:ext uri="{FF2B5EF4-FFF2-40B4-BE49-F238E27FC236}">
-                  <a16:creationId xmlns:a16="http://schemas.microsoft.com/office/drawing/2014/main" xmlns="" id="{14AD3D1C-4811-FDE7-8673-2B25C9C40589}"/>
+                  <a16:creationId xmlns:a16="http://schemas.microsoft.com/office/drawing/2014/main" id="{14AD3D1C-4811-FDE7-8673-2B25C9C40589}"/>
                 </a:ext>
               </a:extLst>
             </p:cNvPr>
@@ -9203,7 +9991,7 @@
             <p:cNvPr id="43" name="그룹 42">
               <a:extLst>
                 <a:ext uri="{FF2B5EF4-FFF2-40B4-BE49-F238E27FC236}">
-                  <a16:creationId xmlns:a16="http://schemas.microsoft.com/office/drawing/2014/main" xmlns="" id="{E4ED83C9-7D1C-261F-1AB4-33D2D92C3759}"/>
+                  <a16:creationId xmlns:a16="http://schemas.microsoft.com/office/drawing/2014/main" id="{E4ED83C9-7D1C-261F-1AB4-33D2D92C3759}"/>
                 </a:ext>
               </a:extLst>
             </p:cNvPr>
@@ -9223,7 +10011,7 @@
               <p:cNvPr id="30" name="내용 개체 틀 1">
                 <a:extLst>
                   <a:ext uri="{FF2B5EF4-FFF2-40B4-BE49-F238E27FC236}">
-                    <a16:creationId xmlns:a16="http://schemas.microsoft.com/office/drawing/2014/main" xmlns="" id="{2EBDDC94-86D1-4814-9590-0B740A448669}"/>
+                    <a16:creationId xmlns:a16="http://schemas.microsoft.com/office/drawing/2014/main" id="{2EBDDC94-86D1-4814-9590-0B740A448669}"/>
                   </a:ext>
                 </a:extLst>
               </p:cNvPr>
@@ -9611,7 +10399,7 @@
             <p:cNvPr id="44" name="그룹 43">
               <a:extLst>
                 <a:ext uri="{FF2B5EF4-FFF2-40B4-BE49-F238E27FC236}">
-                  <a16:creationId xmlns:a16="http://schemas.microsoft.com/office/drawing/2014/main" xmlns="" id="{A62B7F1C-2680-BF02-1CB3-1754A8089ADB}"/>
+                  <a16:creationId xmlns:a16="http://schemas.microsoft.com/office/drawing/2014/main" id="{A62B7F1C-2680-BF02-1CB3-1754A8089ADB}"/>
                 </a:ext>
               </a:extLst>
             </p:cNvPr>
@@ -9631,7 +10419,7 @@
               <p:cNvPr id="45" name="내용 개체 틀 1">
                 <a:extLst>
                   <a:ext uri="{FF2B5EF4-FFF2-40B4-BE49-F238E27FC236}">
-                    <a16:creationId xmlns:a16="http://schemas.microsoft.com/office/drawing/2014/main" xmlns="" id="{CFB6FF55-4B73-86FE-6601-B1385E424E97}"/>
+                    <a16:creationId xmlns:a16="http://schemas.microsoft.com/office/drawing/2014/main" id="{CFB6FF55-4B73-86FE-6601-B1385E424E97}"/>
                   </a:ext>
                 </a:extLst>
               </p:cNvPr>
@@ -9961,7 +10749,7 @@
               <p:cNvPr id="46" name="직사각형 45">
                 <a:extLst>
                   <a:ext uri="{FF2B5EF4-FFF2-40B4-BE49-F238E27FC236}">
-                    <a16:creationId xmlns:a16="http://schemas.microsoft.com/office/drawing/2014/main" xmlns="" id="{6D849D93-4C59-628D-4A52-E58DB4672558}"/>
+                    <a16:creationId xmlns:a16="http://schemas.microsoft.com/office/drawing/2014/main" id="{6D849D93-4C59-628D-4A52-E58DB4672558}"/>
                   </a:ext>
                 </a:extLst>
               </p:cNvPr>
@@ -10064,7 +10852,7 @@
             <p:cNvPr id="63" name="그룹 62">
               <a:extLst>
                 <a:ext uri="{FF2B5EF4-FFF2-40B4-BE49-F238E27FC236}">
-                  <a16:creationId xmlns:a16="http://schemas.microsoft.com/office/drawing/2014/main" xmlns="" id="{D2C40684-10F2-00C5-FE5C-921854025644}"/>
+                  <a16:creationId xmlns:a16="http://schemas.microsoft.com/office/drawing/2014/main" id="{D2C40684-10F2-00C5-FE5C-921854025644}"/>
                 </a:ext>
               </a:extLst>
             </p:cNvPr>
@@ -10084,7 +10872,7 @@
               <p:cNvPr id="64" name="직선 연결선 63">
                 <a:extLst>
                   <a:ext uri="{FF2B5EF4-FFF2-40B4-BE49-F238E27FC236}">
-                    <a16:creationId xmlns:a16="http://schemas.microsoft.com/office/drawing/2014/main" xmlns="" id="{70C37600-B326-46E3-1D27-0E54729CEBED}"/>
+                    <a16:creationId xmlns:a16="http://schemas.microsoft.com/office/drawing/2014/main" id="{70C37600-B326-46E3-1D27-0E54729CEBED}"/>
                   </a:ext>
                 </a:extLst>
               </p:cNvPr>
@@ -10125,7 +10913,7 @@
               <p:cNvPr id="65" name="직선 연결선 64">
                 <a:extLst>
                   <a:ext uri="{FF2B5EF4-FFF2-40B4-BE49-F238E27FC236}">
-                    <a16:creationId xmlns:a16="http://schemas.microsoft.com/office/drawing/2014/main" xmlns="" id="{C3B84592-5263-7C9F-8EDE-4D3B77B044D6}"/>
+                    <a16:creationId xmlns:a16="http://schemas.microsoft.com/office/drawing/2014/main" id="{C3B84592-5263-7C9F-8EDE-4D3B77B044D6}"/>
                   </a:ext>
                 </a:extLst>
               </p:cNvPr>
@@ -10183,7 +10971,7 @@
 </p:sld>
 </file>
 
-<file path=ppt/slides/slide16.xml><?xml version="1.0" encoding="utf-8"?>
+<file path=ppt/slides/slide17.xml><?xml version="1.0" encoding="utf-8"?>
 <p:sld xmlns:a="http://schemas.openxmlformats.org/drawingml/2006/main" xmlns:r="http://schemas.openxmlformats.org/officeDocument/2006/relationships" xmlns:p="http://schemas.openxmlformats.org/presentationml/2006/main">
   <p:cSld>
     <p:spTree>
@@ -10440,7 +11228,7 @@
 </p:sld>
 </file>
 
-<file path=ppt/slides/slide17.xml><?xml version="1.0" encoding="utf-8"?>
+<file path=ppt/slides/slide18.xml><?xml version="1.0" encoding="utf-8"?>
 <p:sld xmlns:a="http://schemas.openxmlformats.org/drawingml/2006/main" xmlns:r="http://schemas.openxmlformats.org/officeDocument/2006/relationships" xmlns:p="http://schemas.openxmlformats.org/presentationml/2006/main">
   <p:cSld>
     <p:spTree>
@@ -10618,7 +11406,7 @@
           <p:cNvPr id="7" name="내용 개체 틀 1">
             <a:extLst>
               <a:ext uri="{FF2B5EF4-FFF2-40B4-BE49-F238E27FC236}">
-                <a16:creationId xmlns:a16="http://schemas.microsoft.com/office/drawing/2014/main" xmlns="" id="{2EBDDC94-86D1-4814-9590-0B740A448669}"/>
+                <a16:creationId xmlns:a16="http://schemas.microsoft.com/office/drawing/2014/main" id="{2EBDDC94-86D1-4814-9590-0B740A448669}"/>
               </a:ext>
             </a:extLst>
           </p:cNvPr>
@@ -11158,7 +11946,7 @@
           <p:cNvPr id="66" name="그룹 65">
             <a:extLst>
               <a:ext uri="{FF2B5EF4-FFF2-40B4-BE49-F238E27FC236}">
-                <a16:creationId xmlns:a16="http://schemas.microsoft.com/office/drawing/2014/main" xmlns="" id="{906DA828-ECE9-2B5C-421D-CFC40B193035}"/>
+                <a16:creationId xmlns:a16="http://schemas.microsoft.com/office/drawing/2014/main" id="{906DA828-ECE9-2B5C-421D-CFC40B193035}"/>
               </a:ext>
             </a:extLst>
           </p:cNvPr>
@@ -11235,7 +12023,7 @@
             <p:cNvPr id="59" name="그룹 58">
               <a:extLst>
                 <a:ext uri="{FF2B5EF4-FFF2-40B4-BE49-F238E27FC236}">
-                  <a16:creationId xmlns:a16="http://schemas.microsoft.com/office/drawing/2014/main" xmlns="" id="{14AD3D1C-4811-FDE7-8673-2B25C9C40589}"/>
+                  <a16:creationId xmlns:a16="http://schemas.microsoft.com/office/drawing/2014/main" id="{14AD3D1C-4811-FDE7-8673-2B25C9C40589}"/>
                 </a:ext>
               </a:extLst>
             </p:cNvPr>
@@ -11326,7 +12114,7 @@
             <p:cNvPr id="43" name="그룹 42">
               <a:extLst>
                 <a:ext uri="{FF2B5EF4-FFF2-40B4-BE49-F238E27FC236}">
-                  <a16:creationId xmlns:a16="http://schemas.microsoft.com/office/drawing/2014/main" xmlns="" id="{E4ED83C9-7D1C-261F-1AB4-33D2D92C3759}"/>
+                  <a16:creationId xmlns:a16="http://schemas.microsoft.com/office/drawing/2014/main" id="{E4ED83C9-7D1C-261F-1AB4-33D2D92C3759}"/>
                 </a:ext>
               </a:extLst>
             </p:cNvPr>
@@ -11346,7 +12134,7 @@
               <p:cNvPr id="30" name="내용 개체 틀 1">
                 <a:extLst>
                   <a:ext uri="{FF2B5EF4-FFF2-40B4-BE49-F238E27FC236}">
-                    <a16:creationId xmlns:a16="http://schemas.microsoft.com/office/drawing/2014/main" xmlns="" id="{2EBDDC94-86D1-4814-9590-0B740A448669}"/>
+                    <a16:creationId xmlns:a16="http://schemas.microsoft.com/office/drawing/2014/main" id="{2EBDDC94-86D1-4814-9590-0B740A448669}"/>
                   </a:ext>
                 </a:extLst>
               </p:cNvPr>
@@ -11746,7 +12534,7 @@
             <p:cNvPr id="44" name="그룹 43">
               <a:extLst>
                 <a:ext uri="{FF2B5EF4-FFF2-40B4-BE49-F238E27FC236}">
-                  <a16:creationId xmlns:a16="http://schemas.microsoft.com/office/drawing/2014/main" xmlns="" id="{A62B7F1C-2680-BF02-1CB3-1754A8089ADB}"/>
+                  <a16:creationId xmlns:a16="http://schemas.microsoft.com/office/drawing/2014/main" id="{A62B7F1C-2680-BF02-1CB3-1754A8089ADB}"/>
                 </a:ext>
               </a:extLst>
             </p:cNvPr>
@@ -11766,7 +12554,7 @@
               <p:cNvPr id="45" name="내용 개체 틀 1">
                 <a:extLst>
                   <a:ext uri="{FF2B5EF4-FFF2-40B4-BE49-F238E27FC236}">
-                    <a16:creationId xmlns:a16="http://schemas.microsoft.com/office/drawing/2014/main" xmlns="" id="{CFB6FF55-4B73-86FE-6601-B1385E424E97}"/>
+                    <a16:creationId xmlns:a16="http://schemas.microsoft.com/office/drawing/2014/main" id="{CFB6FF55-4B73-86FE-6601-B1385E424E97}"/>
                   </a:ext>
                 </a:extLst>
               </p:cNvPr>
@@ -12096,7 +12884,7 @@
               <p:cNvPr id="46" name="직사각형 45">
                 <a:extLst>
                   <a:ext uri="{FF2B5EF4-FFF2-40B4-BE49-F238E27FC236}">
-                    <a16:creationId xmlns:a16="http://schemas.microsoft.com/office/drawing/2014/main" xmlns="" id="{6D849D93-4C59-628D-4A52-E58DB4672558}"/>
+                    <a16:creationId xmlns:a16="http://schemas.microsoft.com/office/drawing/2014/main" id="{6D849D93-4C59-628D-4A52-E58DB4672558}"/>
                   </a:ext>
                 </a:extLst>
               </p:cNvPr>
@@ -12202,7 +12990,7 @@
             <p:cNvPr id="63" name="그룹 62">
               <a:extLst>
                 <a:ext uri="{FF2B5EF4-FFF2-40B4-BE49-F238E27FC236}">
-                  <a16:creationId xmlns:a16="http://schemas.microsoft.com/office/drawing/2014/main" xmlns="" id="{D2C40684-10F2-00C5-FE5C-921854025644}"/>
+                  <a16:creationId xmlns:a16="http://schemas.microsoft.com/office/drawing/2014/main" id="{D2C40684-10F2-00C5-FE5C-921854025644}"/>
                 </a:ext>
               </a:extLst>
             </p:cNvPr>
@@ -12222,7 +13010,7 @@
               <p:cNvPr id="64" name="직선 연결선 63">
                 <a:extLst>
                   <a:ext uri="{FF2B5EF4-FFF2-40B4-BE49-F238E27FC236}">
-                    <a16:creationId xmlns:a16="http://schemas.microsoft.com/office/drawing/2014/main" xmlns="" id="{70C37600-B326-46E3-1D27-0E54729CEBED}"/>
+                    <a16:creationId xmlns:a16="http://schemas.microsoft.com/office/drawing/2014/main" id="{70C37600-B326-46E3-1D27-0E54729CEBED}"/>
                   </a:ext>
                 </a:extLst>
               </p:cNvPr>
@@ -12263,7 +13051,7 @@
               <p:cNvPr id="65" name="직선 연결선 64">
                 <a:extLst>
                   <a:ext uri="{FF2B5EF4-FFF2-40B4-BE49-F238E27FC236}">
-                    <a16:creationId xmlns:a16="http://schemas.microsoft.com/office/drawing/2014/main" xmlns="" id="{C3B84592-5263-7C9F-8EDE-4D3B77B044D6}"/>
+                    <a16:creationId xmlns:a16="http://schemas.microsoft.com/office/drawing/2014/main" id="{C3B84592-5263-7C9F-8EDE-4D3B77B044D6}"/>
                   </a:ext>
                 </a:extLst>
               </p:cNvPr>
@@ -12329,7 +13117,7 @@
         <p:cNvPr id="1" name="">
           <a:extLst>
             <a:ext uri="{FF2B5EF4-FFF2-40B4-BE49-F238E27FC236}">
-              <a16:creationId xmlns="" xmlns:a16="http://schemas.microsoft.com/office/drawing/2014/main" id="{B50C6EE6-4E86-3441-1ED8-7993278AE213}"/>
+              <a16:creationId xmlns:a16="http://schemas.microsoft.com/office/drawing/2014/main" id="{B50C6EE6-4E86-3441-1ED8-7993278AE213}"/>
             </a:ext>
           </a:extLst>
         </p:cNvPr>
@@ -12349,7 +13137,7 @@
           <p:cNvPr id="7" name="제목 3">
             <a:extLst>
               <a:ext uri="{FF2B5EF4-FFF2-40B4-BE49-F238E27FC236}">
-                <a16:creationId xmlns="" xmlns:a16="http://schemas.microsoft.com/office/drawing/2014/main" id="{ACAFEE85-5BDF-B8DD-7649-3D195A1FAD1E}"/>
+                <a16:creationId xmlns:a16="http://schemas.microsoft.com/office/drawing/2014/main" id="{ACAFEE85-5BDF-B8DD-7649-3D195A1FAD1E}"/>
               </a:ext>
             </a:extLst>
           </p:cNvPr>
@@ -12422,7 +13210,7 @@
           <p:cNvPr id="9" name="직사각형 8">
             <a:extLst>
               <a:ext uri="{FF2B5EF4-FFF2-40B4-BE49-F238E27FC236}">
-                <a16:creationId xmlns="" xmlns:a16="http://schemas.microsoft.com/office/drawing/2014/main" id="{47C24BF2-5778-E9A8-608B-2944606F3BDE}"/>
+                <a16:creationId xmlns:a16="http://schemas.microsoft.com/office/drawing/2014/main" id="{47C24BF2-5778-E9A8-608B-2944606F3BDE}"/>
               </a:ext>
             </a:extLst>
           </p:cNvPr>
@@ -12484,7 +13272,7 @@
           <p:cNvPr id="11" name="내용 개체 틀 1">
             <a:extLst>
               <a:ext uri="{FF2B5EF4-FFF2-40B4-BE49-F238E27FC236}">
-                <a16:creationId xmlns="" xmlns:a16="http://schemas.microsoft.com/office/drawing/2014/main" id="{02CCCCC2-7403-31BA-B869-37212D42E446}"/>
+                <a16:creationId xmlns:a16="http://schemas.microsoft.com/office/drawing/2014/main" id="{02CCCCC2-7403-31BA-B869-37212D42E446}"/>
               </a:ext>
             </a:extLst>
           </p:cNvPr>
@@ -12893,7 +13681,7 @@
           <p:cNvPr id="3" name="내용 개체 틀 2">
             <a:extLst>
               <a:ext uri="{FF2B5EF4-FFF2-40B4-BE49-F238E27FC236}">
-                <a16:creationId xmlns="" xmlns:a16="http://schemas.microsoft.com/office/drawing/2014/main" id="{A2720E95-0B45-2851-611F-5ACF54DC4410}"/>
+                <a16:creationId xmlns:a16="http://schemas.microsoft.com/office/drawing/2014/main" id="{A2720E95-0B45-2851-611F-5ACF54DC4410}"/>
               </a:ext>
             </a:extLst>
           </p:cNvPr>
@@ -13610,7 +14398,7 @@
         <p:cNvPr id="1" name="">
           <a:extLst>
             <a:ext uri="{FF2B5EF4-FFF2-40B4-BE49-F238E27FC236}">
-              <a16:creationId xmlns="" xmlns:a16="http://schemas.microsoft.com/office/drawing/2014/main" id="{8BA473E7-7E9A-9BAE-967B-B6B327D1B5B2}"/>
+              <a16:creationId xmlns:a16="http://schemas.microsoft.com/office/drawing/2014/main" id="{8BA473E7-7E9A-9BAE-967B-B6B327D1B5B2}"/>
             </a:ext>
           </a:extLst>
         </p:cNvPr>
@@ -13630,7 +14418,7 @@
           <p:cNvPr id="7" name="제목 3">
             <a:extLst>
               <a:ext uri="{FF2B5EF4-FFF2-40B4-BE49-F238E27FC236}">
-                <a16:creationId xmlns="" xmlns:a16="http://schemas.microsoft.com/office/drawing/2014/main" id="{A19A6C92-6F93-C85F-D3FC-7A40895910A8}"/>
+                <a16:creationId xmlns:a16="http://schemas.microsoft.com/office/drawing/2014/main" id="{A19A6C92-6F93-C85F-D3FC-7A40895910A8}"/>
               </a:ext>
             </a:extLst>
           </p:cNvPr>
@@ -13703,7 +14491,7 @@
           <p:cNvPr id="5" name="그림 4">
             <a:extLst>
               <a:ext uri="{FF2B5EF4-FFF2-40B4-BE49-F238E27FC236}">
-                <a16:creationId xmlns="" xmlns:a16="http://schemas.microsoft.com/office/drawing/2014/main" id="{9F94CF87-7271-6C67-C583-45F3DDBBAADA}"/>
+                <a16:creationId xmlns:a16="http://schemas.microsoft.com/office/drawing/2014/main" id="{9F94CF87-7271-6C67-C583-45F3DDBBAADA}"/>
               </a:ext>
             </a:extLst>
           </p:cNvPr>
@@ -13910,7 +14698,7 @@
           <p:cNvPr id="11" name="내용 개체 틀 1">
             <a:extLst>
               <a:ext uri="{FF2B5EF4-FFF2-40B4-BE49-F238E27FC236}">
-                <a16:creationId xmlns="" xmlns:a16="http://schemas.microsoft.com/office/drawing/2014/main" id="{2EBDDC94-86D1-4814-9590-0B740A448669}"/>
+                <a16:creationId xmlns:a16="http://schemas.microsoft.com/office/drawing/2014/main" id="{2EBDDC94-86D1-4814-9590-0B740A448669}"/>
               </a:ext>
             </a:extLst>
           </p:cNvPr>
@@ -14698,7 +15486,7 @@
           <p:cNvPr id="10" name="내용 개체 틀 1">
             <a:extLst>
               <a:ext uri="{FF2B5EF4-FFF2-40B4-BE49-F238E27FC236}">
-                <a16:creationId xmlns="" xmlns:a16="http://schemas.microsoft.com/office/drawing/2014/main" id="{2EBDDC94-86D1-4814-9590-0B740A448669}"/>
+                <a16:creationId xmlns:a16="http://schemas.microsoft.com/office/drawing/2014/main" id="{2EBDDC94-86D1-4814-9590-0B740A448669}"/>
               </a:ext>
             </a:extLst>
           </p:cNvPr>
